--- a/docs/pptx/carbo/ritu-carbo-linsubhr-dosedisc-aki2.pptx
+++ b/docs/pptx/carbo/ritu-carbo-linsubhr-dosedisc-aki2.pptx
@@ -2443,7 +2443,7 @@
           </p:nvSpPr>
           <p:spPr>
             <a:xfrm>
-              <a:off x="909675" y="1896563"/>
+              <a:off x="911833" y="1896563"/>
               <a:ext cx="0" cy="3826579"/>
             </a:xfrm>
             <a:custGeom>
@@ -2486,7 +2486,7 @@
           </p:nvSpPr>
           <p:spPr>
             <a:xfrm>
-              <a:off x="3323794" y="1896563"/>
+              <a:off x="3322810" y="1896563"/>
               <a:ext cx="0" cy="3826579"/>
             </a:xfrm>
             <a:custGeom>
@@ -2529,7 +2529,7 @@
           </p:nvSpPr>
           <p:spPr>
             <a:xfrm>
-              <a:off x="5737913" y="1896563"/>
+              <a:off x="5733788" y="1896563"/>
               <a:ext cx="0" cy="3826579"/>
             </a:xfrm>
             <a:custGeom>
@@ -2572,7 +2572,7 @@
           </p:nvSpPr>
           <p:spPr>
             <a:xfrm>
-              <a:off x="8152032" y="1896563"/>
+              <a:off x="8144765" y="1896563"/>
               <a:ext cx="0" cy="3826579"/>
             </a:xfrm>
             <a:custGeom>
@@ -2830,7 +2830,7 @@
           </p:nvSpPr>
           <p:spPr>
             <a:xfrm>
-              <a:off x="2116734" y="1896563"/>
+              <a:off x="2117321" y="1896563"/>
               <a:ext cx="0" cy="3826579"/>
             </a:xfrm>
             <a:custGeom>
@@ -2873,7 +2873,7 @@
           </p:nvSpPr>
           <p:spPr>
             <a:xfrm>
-              <a:off x="4530853" y="1896563"/>
+              <a:off x="4528299" y="1896563"/>
               <a:ext cx="0" cy="3826579"/>
             </a:xfrm>
             <a:custGeom>
@@ -2916,7 +2916,7 @@
           </p:nvSpPr>
           <p:spPr>
             <a:xfrm>
-              <a:off x="6944973" y="1896563"/>
+              <a:off x="6939276" y="1896563"/>
               <a:ext cx="0" cy="3826579"/>
             </a:xfrm>
             <a:custGeom>
@@ -2960,515 +2960,515 @@
           <p:spPr>
             <a:xfrm>
               <a:off x="1172049" y="1896563"/>
-              <a:ext cx="7090630" cy="3622615"/>
+              <a:ext cx="7090630" cy="3622487"/>
             </a:xfrm>
             <a:custGeom>
               <a:avLst/>
               <a:pathLst>
-                <a:path w="7090630" h="3622615">
+                <a:path w="7090630" h="3622487">
                   <a:moveTo>
-                    <a:pt x="0" y="1371754"/>
+                    <a:pt x="0" y="1374531"/>
                   </a:moveTo>
                   <a:lnTo>
-                    <a:pt x="71622" y="1418986"/>
-                  </a:lnTo>
-                  <a:lnTo>
-                    <a:pt x="143245" y="1465240"/>
-                  </a:lnTo>
-                  <a:lnTo>
-                    <a:pt x="214867" y="1510537"/>
-                  </a:lnTo>
-                  <a:lnTo>
-                    <a:pt x="286490" y="1554895"/>
-                  </a:lnTo>
-                  <a:lnTo>
-                    <a:pt x="358112" y="1598335"/>
-                  </a:lnTo>
-                  <a:lnTo>
-                    <a:pt x="429735" y="1640875"/>
-                  </a:lnTo>
-                  <a:lnTo>
-                    <a:pt x="501357" y="1682534"/>
-                  </a:lnTo>
-                  <a:lnTo>
-                    <a:pt x="572980" y="1723331"/>
-                  </a:lnTo>
-                  <a:lnTo>
-                    <a:pt x="644602" y="1763283"/>
-                  </a:lnTo>
-                  <a:lnTo>
-                    <a:pt x="716225" y="1802407"/>
-                  </a:lnTo>
-                  <a:lnTo>
-                    <a:pt x="787847" y="1840722"/>
-                  </a:lnTo>
-                  <a:lnTo>
-                    <a:pt x="859470" y="1878243"/>
-                  </a:lnTo>
-                  <a:lnTo>
-                    <a:pt x="931092" y="1914987"/>
-                  </a:lnTo>
-                  <a:lnTo>
-                    <a:pt x="1002715" y="1950970"/>
-                  </a:lnTo>
-                  <a:lnTo>
-                    <a:pt x="1074337" y="1986208"/>
-                  </a:lnTo>
-                  <a:lnTo>
-                    <a:pt x="1145960" y="2020716"/>
-                  </a:lnTo>
-                  <a:lnTo>
-                    <a:pt x="1217582" y="2054510"/>
-                  </a:lnTo>
-                  <a:lnTo>
-                    <a:pt x="1289205" y="2087603"/>
-                  </a:lnTo>
-                  <a:lnTo>
-                    <a:pt x="1360827" y="2120012"/>
-                  </a:lnTo>
-                  <a:lnTo>
-                    <a:pt x="1432450" y="2151749"/>
-                  </a:lnTo>
-                  <a:lnTo>
-                    <a:pt x="1504073" y="2182830"/>
-                  </a:lnTo>
-                  <a:lnTo>
-                    <a:pt x="1575695" y="2213266"/>
-                  </a:lnTo>
-                  <a:lnTo>
-                    <a:pt x="1647318" y="2243073"/>
-                  </a:lnTo>
-                  <a:lnTo>
-                    <a:pt x="1718940" y="2272262"/>
-                  </a:lnTo>
-                  <a:lnTo>
-                    <a:pt x="1790563" y="2300846"/>
-                  </a:lnTo>
-                  <a:lnTo>
-                    <a:pt x="1862185" y="2328839"/>
-                  </a:lnTo>
-                  <a:lnTo>
-                    <a:pt x="1933808" y="2356252"/>
-                  </a:lnTo>
-                  <a:lnTo>
-                    <a:pt x="2005430" y="2383098"/>
-                  </a:lnTo>
-                  <a:lnTo>
-                    <a:pt x="2077053" y="2409387"/>
-                  </a:lnTo>
-                  <a:lnTo>
-                    <a:pt x="2148675" y="2435132"/>
-                  </a:lnTo>
-                  <a:lnTo>
-                    <a:pt x="2220298" y="2460344"/>
-                  </a:lnTo>
-                  <a:lnTo>
-                    <a:pt x="2291920" y="2485034"/>
-                  </a:lnTo>
-                  <a:lnTo>
-                    <a:pt x="2363543" y="2509213"/>
-                  </a:lnTo>
-                  <a:lnTo>
-                    <a:pt x="2435165" y="2532891"/>
-                  </a:lnTo>
-                  <a:lnTo>
-                    <a:pt x="2506788" y="2556078"/>
-                  </a:lnTo>
-                  <a:lnTo>
-                    <a:pt x="2578410" y="2578786"/>
-                  </a:lnTo>
-                  <a:lnTo>
-                    <a:pt x="2650033" y="2601023"/>
-                  </a:lnTo>
-                  <a:lnTo>
-                    <a:pt x="2721655" y="2622800"/>
-                  </a:lnTo>
-                  <a:lnTo>
-                    <a:pt x="2793278" y="2644126"/>
-                  </a:lnTo>
-                  <a:lnTo>
-                    <a:pt x="2864901" y="2665010"/>
-                  </a:lnTo>
-                  <a:lnTo>
-                    <a:pt x="2936523" y="2685462"/>
-                  </a:lnTo>
-                  <a:lnTo>
-                    <a:pt x="3008146" y="2705490"/>
-                  </a:lnTo>
-                  <a:lnTo>
-                    <a:pt x="3079768" y="2725103"/>
-                  </a:lnTo>
-                  <a:lnTo>
-                    <a:pt x="3151391" y="2744311"/>
-                  </a:lnTo>
-                  <a:lnTo>
-                    <a:pt x="3223013" y="2763120"/>
-                  </a:lnTo>
-                  <a:lnTo>
-                    <a:pt x="3294636" y="2781540"/>
-                  </a:lnTo>
-                  <a:lnTo>
-                    <a:pt x="3366258" y="2722395"/>
-                  </a:lnTo>
-                  <a:lnTo>
-                    <a:pt x="3437881" y="2651897"/>
-                  </a:lnTo>
-                  <a:lnTo>
-                    <a:pt x="3509503" y="2576056"/>
-                  </a:lnTo>
-                  <a:lnTo>
-                    <a:pt x="3581126" y="2494469"/>
-                  </a:lnTo>
-                  <a:lnTo>
-                    <a:pt x="3652748" y="2406698"/>
-                  </a:lnTo>
-                  <a:lnTo>
-                    <a:pt x="3724371" y="2312275"/>
-                  </a:lnTo>
-                  <a:lnTo>
-                    <a:pt x="3795993" y="2210697"/>
-                  </a:lnTo>
-                  <a:lnTo>
-                    <a:pt x="3867616" y="2101421"/>
-                  </a:lnTo>
-                  <a:lnTo>
-                    <a:pt x="3939238" y="1983863"/>
-                  </a:lnTo>
-                  <a:lnTo>
-                    <a:pt x="4010861" y="1857397"/>
-                  </a:lnTo>
-                  <a:lnTo>
-                    <a:pt x="4082483" y="1721346"/>
-                  </a:lnTo>
-                  <a:lnTo>
-                    <a:pt x="4154106" y="1574985"/>
-                  </a:lnTo>
-                  <a:lnTo>
-                    <a:pt x="4225729" y="1417532"/>
-                  </a:lnTo>
-                  <a:lnTo>
-                    <a:pt x="4297351" y="1248147"/>
-                  </a:lnTo>
-                  <a:lnTo>
-                    <a:pt x="4368974" y="1065925"/>
-                  </a:lnTo>
-                  <a:lnTo>
-                    <a:pt x="4440596" y="869894"/>
-                  </a:lnTo>
-                  <a:lnTo>
-                    <a:pt x="4512219" y="659007"/>
-                  </a:lnTo>
-                  <a:lnTo>
-                    <a:pt x="4583841" y="432137"/>
-                  </a:lnTo>
-                  <a:lnTo>
-                    <a:pt x="4655464" y="188075"/>
-                  </a:lnTo>
-                  <a:lnTo>
-                    <a:pt x="4706768" y="0"/>
+                    <a:pt x="71622" y="1421767"/>
+                  </a:lnTo>
+                  <a:lnTo>
+                    <a:pt x="143245" y="1468023"/>
+                  </a:lnTo>
+                  <a:lnTo>
+                    <a:pt x="214867" y="1513320"/>
+                  </a:lnTo>
+                  <a:lnTo>
+                    <a:pt x="286490" y="1557678"/>
+                  </a:lnTo>
+                  <a:lnTo>
+                    <a:pt x="358112" y="1601116"/>
+                  </a:lnTo>
+                  <a:lnTo>
+                    <a:pt x="429735" y="1643654"/>
+                  </a:lnTo>
+                  <a:lnTo>
+                    <a:pt x="501357" y="1685309"/>
+                  </a:lnTo>
+                  <a:lnTo>
+                    <a:pt x="572980" y="1726101"/>
+                  </a:lnTo>
+                  <a:lnTo>
+                    <a:pt x="644602" y="1766047"/>
+                  </a:lnTo>
+                  <a:lnTo>
+                    <a:pt x="716225" y="1805165"/>
+                  </a:lnTo>
+                  <a:lnTo>
+                    <a:pt x="787847" y="1843472"/>
+                  </a:lnTo>
+                  <a:lnTo>
+                    <a:pt x="859470" y="1880984"/>
+                  </a:lnTo>
+                  <a:lnTo>
+                    <a:pt x="931092" y="1917719"/>
+                  </a:lnTo>
+                  <a:lnTo>
+                    <a:pt x="1002715" y="1953692"/>
+                  </a:lnTo>
+                  <a:lnTo>
+                    <a:pt x="1074337" y="1988919"/>
+                  </a:lnTo>
+                  <a:lnTo>
+                    <a:pt x="1145960" y="2023415"/>
+                  </a:lnTo>
+                  <a:lnTo>
+                    <a:pt x="1217582" y="2057197"/>
+                  </a:lnTo>
+                  <a:lnTo>
+                    <a:pt x="1289205" y="2090278"/>
+                  </a:lnTo>
+                  <a:lnTo>
+                    <a:pt x="1360827" y="2122673"/>
+                  </a:lnTo>
+                  <a:lnTo>
+                    <a:pt x="1432450" y="2154396"/>
+                  </a:lnTo>
+                  <a:lnTo>
+                    <a:pt x="1504073" y="2185461"/>
+                  </a:lnTo>
+                  <a:lnTo>
+                    <a:pt x="1575695" y="2215883"/>
+                  </a:lnTo>
+                  <a:lnTo>
+                    <a:pt x="1647318" y="2245673"/>
+                  </a:lnTo>
+                  <a:lnTo>
+                    <a:pt x="1718940" y="2274846"/>
+                  </a:lnTo>
+                  <a:lnTo>
+                    <a:pt x="1790563" y="2303414"/>
+                  </a:lnTo>
+                  <a:lnTo>
+                    <a:pt x="1862185" y="2331390"/>
+                  </a:lnTo>
+                  <a:lnTo>
+                    <a:pt x="1933808" y="2358786"/>
+                  </a:lnTo>
+                  <a:lnTo>
+                    <a:pt x="2005430" y="2385613"/>
+                  </a:lnTo>
+                  <a:lnTo>
+                    <a:pt x="2077053" y="2411885"/>
+                  </a:lnTo>
+                  <a:lnTo>
+                    <a:pt x="2148675" y="2437611"/>
+                  </a:lnTo>
+                  <a:lnTo>
+                    <a:pt x="2220298" y="2462804"/>
+                  </a:lnTo>
+                  <a:lnTo>
+                    <a:pt x="2291920" y="2487475"/>
+                  </a:lnTo>
+                  <a:lnTo>
+                    <a:pt x="2363543" y="2511634"/>
+                  </a:lnTo>
+                  <a:lnTo>
+                    <a:pt x="2435165" y="2535293"/>
+                  </a:lnTo>
+                  <a:lnTo>
+                    <a:pt x="2506788" y="2558461"/>
+                  </a:lnTo>
+                  <a:lnTo>
+                    <a:pt x="2578410" y="2581148"/>
+                  </a:lnTo>
+                  <a:lnTo>
+                    <a:pt x="2650033" y="2603365"/>
+                  </a:lnTo>
+                  <a:lnTo>
+                    <a:pt x="2721655" y="2625121"/>
+                  </a:lnTo>
+                  <a:lnTo>
+                    <a:pt x="2793278" y="2646427"/>
+                  </a:lnTo>
+                  <a:lnTo>
+                    <a:pt x="2864901" y="2667290"/>
+                  </a:lnTo>
+                  <a:lnTo>
+                    <a:pt x="2936523" y="2687721"/>
+                  </a:lnTo>
+                  <a:lnTo>
+                    <a:pt x="3008146" y="2707728"/>
+                  </a:lnTo>
+                  <a:lnTo>
+                    <a:pt x="3079768" y="2727321"/>
+                  </a:lnTo>
+                  <a:lnTo>
+                    <a:pt x="3151391" y="2746507"/>
+                  </a:lnTo>
+                  <a:lnTo>
+                    <a:pt x="3223013" y="2765295"/>
+                  </a:lnTo>
+                  <a:lnTo>
+                    <a:pt x="3294636" y="2780421"/>
+                  </a:lnTo>
+                  <a:lnTo>
+                    <a:pt x="3366258" y="2714232"/>
+                  </a:lnTo>
+                  <a:lnTo>
+                    <a:pt x="3437881" y="2643019"/>
+                  </a:lnTo>
+                  <a:lnTo>
+                    <a:pt x="3509503" y="2566402"/>
+                  </a:lnTo>
+                  <a:lnTo>
+                    <a:pt x="3581126" y="2483972"/>
+                  </a:lnTo>
+                  <a:lnTo>
+                    <a:pt x="3652748" y="2395286"/>
+                  </a:lnTo>
+                  <a:lnTo>
+                    <a:pt x="3724371" y="2299869"/>
+                  </a:lnTo>
+                  <a:lnTo>
+                    <a:pt x="3795993" y="2197213"/>
+                  </a:lnTo>
+                  <a:lnTo>
+                    <a:pt x="3867616" y="2086765"/>
+                  </a:lnTo>
+                  <a:lnTo>
+                    <a:pt x="3939238" y="1967937"/>
+                  </a:lnTo>
+                  <a:lnTo>
+                    <a:pt x="4010861" y="1840091"/>
+                  </a:lnTo>
+                  <a:lnTo>
+                    <a:pt x="4082483" y="1702543"/>
+                  </a:lnTo>
+                  <a:lnTo>
+                    <a:pt x="4154106" y="1554557"/>
+                  </a:lnTo>
+                  <a:lnTo>
+                    <a:pt x="4225729" y="1395341"/>
+                  </a:lnTo>
+                  <a:lnTo>
+                    <a:pt x="4297351" y="1224043"/>
+                  </a:lnTo>
+                  <a:lnTo>
+                    <a:pt x="4368974" y="1039746"/>
+                  </a:lnTo>
+                  <a:lnTo>
+                    <a:pt x="4440596" y="841463"/>
+                  </a:lnTo>
+                  <a:lnTo>
+                    <a:pt x="4512219" y="628133"/>
+                  </a:lnTo>
+                  <a:lnTo>
+                    <a:pt x="4583841" y="398614"/>
+                  </a:lnTo>
+                  <a:lnTo>
+                    <a:pt x="4655464" y="151678"/>
+                  </a:lnTo>
+                  <a:lnTo>
+                    <a:pt x="4696354" y="0"/>
                   </a:lnTo>
                   <a:lnTo>
                     <a:pt x="7090630" y="0"/>
                   </a:lnTo>
                   <a:lnTo>
-                    <a:pt x="7090630" y="3365287"/>
-                  </a:lnTo>
-                  <a:lnTo>
-                    <a:pt x="7019007" y="3359210"/>
-                  </a:lnTo>
-                  <a:lnTo>
-                    <a:pt x="6947385" y="3353006"/>
-                  </a:lnTo>
-                  <a:lnTo>
-                    <a:pt x="6875762" y="3346670"/>
-                  </a:lnTo>
-                  <a:lnTo>
-                    <a:pt x="6804139" y="3340200"/>
-                  </a:lnTo>
-                  <a:lnTo>
-                    <a:pt x="6732517" y="3333593"/>
-                  </a:lnTo>
-                  <a:lnTo>
-                    <a:pt x="6660894" y="3326846"/>
-                  </a:lnTo>
-                  <a:lnTo>
-                    <a:pt x="6589272" y="3319957"/>
-                  </a:lnTo>
-                  <a:lnTo>
-                    <a:pt x="6517649" y="3312922"/>
-                  </a:lnTo>
-                  <a:lnTo>
-                    <a:pt x="6446027" y="3305738"/>
-                  </a:lnTo>
-                  <a:lnTo>
-                    <a:pt x="6374404" y="3298403"/>
-                  </a:lnTo>
-                  <a:lnTo>
-                    <a:pt x="6302782" y="3290912"/>
-                  </a:lnTo>
-                  <a:lnTo>
-                    <a:pt x="6231159" y="3283263"/>
-                  </a:lnTo>
-                  <a:lnTo>
-                    <a:pt x="6159537" y="3275452"/>
-                  </a:lnTo>
-                  <a:lnTo>
-                    <a:pt x="6087914" y="3267476"/>
-                  </a:lnTo>
-                  <a:lnTo>
-                    <a:pt x="6016292" y="3259332"/>
-                  </a:lnTo>
-                  <a:lnTo>
-                    <a:pt x="5944669" y="3251015"/>
-                  </a:lnTo>
-                  <a:lnTo>
-                    <a:pt x="5873047" y="3242522"/>
-                  </a:lnTo>
-                  <a:lnTo>
-                    <a:pt x="5801424" y="3233850"/>
-                  </a:lnTo>
-                  <a:lnTo>
-                    <a:pt x="5729802" y="3224994"/>
-                  </a:lnTo>
-                  <a:lnTo>
-                    <a:pt x="5658179" y="3215951"/>
-                  </a:lnTo>
-                  <a:lnTo>
-                    <a:pt x="5586557" y="3206717"/>
-                  </a:lnTo>
-                  <a:lnTo>
-                    <a:pt x="5514934" y="3197288"/>
-                  </a:lnTo>
-                  <a:lnTo>
-                    <a:pt x="5443311" y="3187659"/>
-                  </a:lnTo>
-                  <a:lnTo>
-                    <a:pt x="5371689" y="3177827"/>
-                  </a:lnTo>
-                  <a:lnTo>
-                    <a:pt x="5300066" y="3167786"/>
-                  </a:lnTo>
-                  <a:lnTo>
-                    <a:pt x="5228444" y="3157534"/>
-                  </a:lnTo>
-                  <a:lnTo>
-                    <a:pt x="5156821" y="3147064"/>
-                  </a:lnTo>
-                  <a:lnTo>
-                    <a:pt x="5085199" y="3136373"/>
-                  </a:lnTo>
-                  <a:lnTo>
-                    <a:pt x="5013576" y="3125456"/>
-                  </a:lnTo>
-                  <a:lnTo>
-                    <a:pt x="4941954" y="3114309"/>
-                  </a:lnTo>
-                  <a:lnTo>
-                    <a:pt x="4870331" y="3102925"/>
-                  </a:lnTo>
-                  <a:lnTo>
-                    <a:pt x="4798709" y="3091301"/>
-                  </a:lnTo>
-                  <a:lnTo>
-                    <a:pt x="4727086" y="3079431"/>
-                  </a:lnTo>
-                  <a:lnTo>
-                    <a:pt x="4655464" y="3067310"/>
-                  </a:lnTo>
-                  <a:lnTo>
-                    <a:pt x="4583841" y="3054933"/>
-                  </a:lnTo>
-                  <a:lnTo>
-                    <a:pt x="4512219" y="3042294"/>
-                  </a:lnTo>
-                  <a:lnTo>
-                    <a:pt x="4440596" y="3029388"/>
-                  </a:lnTo>
-                  <a:lnTo>
-                    <a:pt x="4368974" y="3016208"/>
-                  </a:lnTo>
-                  <a:lnTo>
-                    <a:pt x="4297351" y="3002751"/>
-                  </a:lnTo>
-                  <a:lnTo>
-                    <a:pt x="4225729" y="2989008"/>
-                  </a:lnTo>
-                  <a:lnTo>
-                    <a:pt x="4154106" y="2974975"/>
-                  </a:lnTo>
-                  <a:lnTo>
-                    <a:pt x="4082483" y="2960645"/>
-                  </a:lnTo>
-                  <a:lnTo>
-                    <a:pt x="4010861" y="2946013"/>
-                  </a:lnTo>
-                  <a:lnTo>
-                    <a:pt x="3939238" y="2931070"/>
-                  </a:lnTo>
-                  <a:lnTo>
-                    <a:pt x="3867616" y="2915812"/>
-                  </a:lnTo>
-                  <a:lnTo>
-                    <a:pt x="3795993" y="2900232"/>
-                  </a:lnTo>
-                  <a:lnTo>
-                    <a:pt x="3724371" y="2884321"/>
-                  </a:lnTo>
-                  <a:lnTo>
-                    <a:pt x="3652748" y="2868075"/>
-                  </a:lnTo>
-                  <a:lnTo>
-                    <a:pt x="3581126" y="2851484"/>
-                  </a:lnTo>
-                  <a:lnTo>
-                    <a:pt x="3509503" y="2834543"/>
-                  </a:lnTo>
-                  <a:lnTo>
-                    <a:pt x="3437881" y="2817244"/>
-                  </a:lnTo>
-                  <a:lnTo>
-                    <a:pt x="3366258" y="2799579"/>
-                  </a:lnTo>
-                  <a:lnTo>
-                    <a:pt x="3294636" y="2787926"/>
-                  </a:lnTo>
-                  <a:lnTo>
-                    <a:pt x="3223013" y="2848841"/>
-                  </a:lnTo>
-                  <a:lnTo>
-                    <a:pt x="3151391" y="2905465"/>
-                  </a:lnTo>
-                  <a:lnTo>
-                    <a:pt x="3079768" y="2958100"/>
-                  </a:lnTo>
-                  <a:lnTo>
-                    <a:pt x="3008146" y="3007028"/>
-                  </a:lnTo>
-                  <a:lnTo>
-                    <a:pt x="2936523" y="3052508"/>
-                  </a:lnTo>
-                  <a:lnTo>
-                    <a:pt x="2864901" y="3094785"/>
-                  </a:lnTo>
-                  <a:lnTo>
-                    <a:pt x="2793278" y="3134083"/>
-                  </a:lnTo>
-                  <a:lnTo>
-                    <a:pt x="2721655" y="3170613"/>
-                  </a:lnTo>
-                  <a:lnTo>
-                    <a:pt x="2650033" y="3204570"/>
-                  </a:lnTo>
-                  <a:lnTo>
-                    <a:pt x="2578410" y="3236135"/>
-                  </a:lnTo>
-                  <a:lnTo>
-                    <a:pt x="2506788" y="3265476"/>
-                  </a:lnTo>
-                  <a:lnTo>
-                    <a:pt x="2435165" y="3292750"/>
-                  </a:lnTo>
-                  <a:lnTo>
-                    <a:pt x="2363543" y="3318102"/>
-                  </a:lnTo>
-                  <a:lnTo>
-                    <a:pt x="2291920" y="3341669"/>
-                  </a:lnTo>
-                  <a:lnTo>
-                    <a:pt x="2220298" y="3363576"/>
-                  </a:lnTo>
-                  <a:lnTo>
-                    <a:pt x="2148675" y="3383939"/>
-                  </a:lnTo>
-                  <a:lnTo>
-                    <a:pt x="2077053" y="3402868"/>
-                  </a:lnTo>
-                  <a:lnTo>
-                    <a:pt x="2005430" y="3420464"/>
-                  </a:lnTo>
-                  <a:lnTo>
-                    <a:pt x="1933808" y="3436820"/>
-                  </a:lnTo>
-                  <a:lnTo>
-                    <a:pt x="1862185" y="3452023"/>
-                  </a:lnTo>
-                  <a:lnTo>
-                    <a:pt x="1790563" y="3466156"/>
-                  </a:lnTo>
-                  <a:lnTo>
-                    <a:pt x="1718940" y="3479293"/>
-                  </a:lnTo>
-                  <a:lnTo>
-                    <a:pt x="1647318" y="3491505"/>
-                  </a:lnTo>
-                  <a:lnTo>
-                    <a:pt x="1575695" y="3502856"/>
-                  </a:lnTo>
-                  <a:lnTo>
-                    <a:pt x="1504073" y="3513408"/>
-                  </a:lnTo>
-                  <a:lnTo>
-                    <a:pt x="1432450" y="3523217"/>
-                  </a:lnTo>
-                  <a:lnTo>
-                    <a:pt x="1360827" y="3532334"/>
-                  </a:lnTo>
-                  <a:lnTo>
-                    <a:pt x="1289205" y="3540809"/>
-                  </a:lnTo>
-                  <a:lnTo>
-                    <a:pt x="1217582" y="3548687"/>
-                  </a:lnTo>
-                  <a:lnTo>
-                    <a:pt x="1145960" y="3556011"/>
-                  </a:lnTo>
-                  <a:lnTo>
-                    <a:pt x="1074337" y="3562818"/>
-                  </a:lnTo>
-                  <a:lnTo>
-                    <a:pt x="1002715" y="3569146"/>
-                  </a:lnTo>
-                  <a:lnTo>
-                    <a:pt x="931092" y="3575028"/>
-                  </a:lnTo>
-                  <a:lnTo>
-                    <a:pt x="859470" y="3580495"/>
-                  </a:lnTo>
-                  <a:lnTo>
-                    <a:pt x="787847" y="3585578"/>
-                  </a:lnTo>
-                  <a:lnTo>
-                    <a:pt x="716225" y="3590302"/>
-                  </a:lnTo>
-                  <a:lnTo>
-                    <a:pt x="644602" y="3594694"/>
-                  </a:lnTo>
-                  <a:lnTo>
-                    <a:pt x="572980" y="3598776"/>
-                  </a:lnTo>
-                  <a:lnTo>
-                    <a:pt x="501357" y="3602571"/>
-                  </a:lnTo>
-                  <a:lnTo>
-                    <a:pt x="429735" y="3606098"/>
-                  </a:lnTo>
-                  <a:lnTo>
-                    <a:pt x="358112" y="3609377"/>
-                  </a:lnTo>
-                  <a:lnTo>
-                    <a:pt x="286490" y="3612425"/>
-                  </a:lnTo>
-                  <a:lnTo>
-                    <a:pt x="214867" y="3615258"/>
-                  </a:lnTo>
-                  <a:lnTo>
-                    <a:pt x="143245" y="3617892"/>
-                  </a:lnTo>
-                  <a:lnTo>
-                    <a:pt x="71622" y="3620340"/>
-                  </a:lnTo>
-                  <a:lnTo>
-                    <a:pt x="0" y="3622615"/>
+                    <a:pt x="7090630" y="3366412"/>
+                  </a:lnTo>
+                  <a:lnTo>
+                    <a:pt x="7019007" y="3360352"/>
+                  </a:lnTo>
+                  <a:lnTo>
+                    <a:pt x="6947385" y="3354163"/>
+                  </a:lnTo>
+                  <a:lnTo>
+                    <a:pt x="6875762" y="3347843"/>
+                  </a:lnTo>
+                  <a:lnTo>
+                    <a:pt x="6804139" y="3341389"/>
+                  </a:lnTo>
+                  <a:lnTo>
+                    <a:pt x="6732517" y="3334799"/>
+                  </a:lnTo>
+                  <a:lnTo>
+                    <a:pt x="6660894" y="3328069"/>
+                  </a:lnTo>
+                  <a:lnTo>
+                    <a:pt x="6589272" y="3321196"/>
+                  </a:lnTo>
+                  <a:lnTo>
+                    <a:pt x="6517649" y="3314179"/>
+                  </a:lnTo>
+                  <a:lnTo>
+                    <a:pt x="6446027" y="3307012"/>
+                  </a:lnTo>
+                  <a:lnTo>
+                    <a:pt x="6374404" y="3299694"/>
+                  </a:lnTo>
+                  <a:lnTo>
+                    <a:pt x="6302782" y="3292221"/>
+                  </a:lnTo>
+                  <a:lnTo>
+                    <a:pt x="6231159" y="3284589"/>
+                  </a:lnTo>
+                  <a:lnTo>
+                    <a:pt x="6159537" y="3276796"/>
+                  </a:lnTo>
+                  <a:lnTo>
+                    <a:pt x="6087914" y="3268838"/>
+                  </a:lnTo>
+                  <a:lnTo>
+                    <a:pt x="6016292" y="3260711"/>
+                  </a:lnTo>
+                  <a:lnTo>
+                    <a:pt x="5944669" y="3252413"/>
+                  </a:lnTo>
+                  <a:lnTo>
+                    <a:pt x="5873047" y="3243939"/>
+                  </a:lnTo>
+                  <a:lnTo>
+                    <a:pt x="5801424" y="3235285"/>
+                  </a:lnTo>
+                  <a:lnTo>
+                    <a:pt x="5729802" y="3226448"/>
+                  </a:lnTo>
+                  <a:lnTo>
+                    <a:pt x="5658179" y="3217424"/>
+                  </a:lnTo>
+                  <a:lnTo>
+                    <a:pt x="5586557" y="3208209"/>
+                  </a:lnTo>
+                  <a:lnTo>
+                    <a:pt x="5514934" y="3198798"/>
+                  </a:lnTo>
+                  <a:lnTo>
+                    <a:pt x="5443311" y="3189189"/>
+                  </a:lnTo>
+                  <a:lnTo>
+                    <a:pt x="5371689" y="3179376"/>
+                  </a:lnTo>
+                  <a:lnTo>
+                    <a:pt x="5300066" y="3169355"/>
+                  </a:lnTo>
+                  <a:lnTo>
+                    <a:pt x="5228444" y="3159122"/>
+                  </a:lnTo>
+                  <a:lnTo>
+                    <a:pt x="5156821" y="3148672"/>
+                  </a:lnTo>
+                  <a:lnTo>
+                    <a:pt x="5085199" y="3138002"/>
+                  </a:lnTo>
+                  <a:lnTo>
+                    <a:pt x="5013576" y="3127105"/>
+                  </a:lnTo>
+                  <a:lnTo>
+                    <a:pt x="4941954" y="3115977"/>
+                  </a:lnTo>
+                  <a:lnTo>
+                    <a:pt x="4870331" y="3104614"/>
+                  </a:lnTo>
+                  <a:lnTo>
+                    <a:pt x="4798709" y="3093010"/>
+                  </a:lnTo>
+                  <a:lnTo>
+                    <a:pt x="4727086" y="3081161"/>
+                  </a:lnTo>
+                  <a:lnTo>
+                    <a:pt x="4655464" y="3069060"/>
+                  </a:lnTo>
+                  <a:lnTo>
+                    <a:pt x="4583841" y="3056704"/>
+                  </a:lnTo>
+                  <a:lnTo>
+                    <a:pt x="4512219" y="3044086"/>
+                  </a:lnTo>
+                  <a:lnTo>
+                    <a:pt x="4440596" y="3031200"/>
+                  </a:lnTo>
+                  <a:lnTo>
+                    <a:pt x="4368974" y="3018042"/>
+                  </a:lnTo>
+                  <a:lnTo>
+                    <a:pt x="4297351" y="3004605"/>
+                  </a:lnTo>
+                  <a:lnTo>
+                    <a:pt x="4225729" y="2990884"/>
+                  </a:lnTo>
+                  <a:lnTo>
+                    <a:pt x="4154106" y="2976872"/>
+                  </a:lnTo>
+                  <a:lnTo>
+                    <a:pt x="4082483" y="2962564"/>
+                  </a:lnTo>
+                  <a:lnTo>
+                    <a:pt x="4010861" y="2947952"/>
+                  </a:lnTo>
+                  <a:lnTo>
+                    <a:pt x="3939238" y="2933031"/>
+                  </a:lnTo>
+                  <a:lnTo>
+                    <a:pt x="3867616" y="2917795"/>
+                  </a:lnTo>
+                  <a:lnTo>
+                    <a:pt x="3795993" y="2902235"/>
+                  </a:lnTo>
+                  <a:lnTo>
+                    <a:pt x="3724371" y="2886346"/>
+                  </a:lnTo>
+                  <a:lnTo>
+                    <a:pt x="3652748" y="2870121"/>
+                  </a:lnTo>
+                  <a:lnTo>
+                    <a:pt x="3581126" y="2853552"/>
+                  </a:lnTo>
+                  <a:lnTo>
+                    <a:pt x="3509503" y="2836633"/>
+                  </a:lnTo>
+                  <a:lnTo>
+                    <a:pt x="3437881" y="2819355"/>
+                  </a:lnTo>
+                  <a:lnTo>
+                    <a:pt x="3366258" y="2801711"/>
+                  </a:lnTo>
+                  <a:lnTo>
+                    <a:pt x="3294636" y="2783694"/>
+                  </a:lnTo>
+                  <a:lnTo>
+                    <a:pt x="3223013" y="2841942"/>
+                  </a:lnTo>
+                  <a:lnTo>
+                    <a:pt x="3151391" y="2899124"/>
+                  </a:lnTo>
+                  <a:lnTo>
+                    <a:pt x="3079768" y="2952272"/>
+                  </a:lnTo>
+                  <a:lnTo>
+                    <a:pt x="3008146" y="3001672"/>
+                  </a:lnTo>
+                  <a:lnTo>
+                    <a:pt x="2936523" y="3047588"/>
+                  </a:lnTo>
+                  <a:lnTo>
+                    <a:pt x="2864901" y="3090264"/>
+                  </a:lnTo>
+                  <a:lnTo>
+                    <a:pt x="2793278" y="3129931"/>
+                  </a:lnTo>
+                  <a:lnTo>
+                    <a:pt x="2721655" y="3166800"/>
+                  </a:lnTo>
+                  <a:lnTo>
+                    <a:pt x="2650033" y="3201068"/>
+                  </a:lnTo>
+                  <a:lnTo>
+                    <a:pt x="2578410" y="3232920"/>
+                  </a:lnTo>
+                  <a:lnTo>
+                    <a:pt x="2506788" y="3262524"/>
+                  </a:lnTo>
+                  <a:lnTo>
+                    <a:pt x="2435165" y="3290041"/>
+                  </a:lnTo>
+                  <a:lnTo>
+                    <a:pt x="2363543" y="3315616"/>
+                  </a:lnTo>
+                  <a:lnTo>
+                    <a:pt x="2291920" y="3339388"/>
+                  </a:lnTo>
+                  <a:lnTo>
+                    <a:pt x="2220298" y="3361483"/>
+                  </a:lnTo>
+                  <a:lnTo>
+                    <a:pt x="2148675" y="3382020"/>
+                  </a:lnTo>
+                  <a:lnTo>
+                    <a:pt x="2077053" y="3401108"/>
+                  </a:lnTo>
+                  <a:lnTo>
+                    <a:pt x="2005430" y="3418850"/>
+                  </a:lnTo>
+                  <a:lnTo>
+                    <a:pt x="1933808" y="3435340"/>
+                  </a:lnTo>
+                  <a:lnTo>
+                    <a:pt x="1862185" y="3450667"/>
+                  </a:lnTo>
+                  <a:lnTo>
+                    <a:pt x="1790563" y="3464913"/>
+                  </a:lnTo>
+                  <a:lnTo>
+                    <a:pt x="1718940" y="3478155"/>
+                  </a:lnTo>
+                  <a:lnTo>
+                    <a:pt x="1647318" y="3490462"/>
+                  </a:lnTo>
+                  <a:lnTo>
+                    <a:pt x="1575695" y="3501901"/>
+                  </a:lnTo>
+                  <a:lnTo>
+                    <a:pt x="1504073" y="3512534"/>
+                  </a:lnTo>
+                  <a:lnTo>
+                    <a:pt x="1432450" y="3522416"/>
+                  </a:lnTo>
+                  <a:lnTo>
+                    <a:pt x="1360827" y="3531601"/>
+                  </a:lnTo>
+                  <a:lnTo>
+                    <a:pt x="1289205" y="3540139"/>
+                  </a:lnTo>
+                  <a:lnTo>
+                    <a:pt x="1217582" y="3548074"/>
+                  </a:lnTo>
+                  <a:lnTo>
+                    <a:pt x="1145960" y="3555450"/>
+                  </a:lnTo>
+                  <a:lnTo>
+                    <a:pt x="1074337" y="3562305"/>
+                  </a:lnTo>
+                  <a:lnTo>
+                    <a:pt x="1002715" y="3568677"/>
+                  </a:lnTo>
+                  <a:lnTo>
+                    <a:pt x="931092" y="3574600"/>
+                  </a:lnTo>
+                  <a:lnTo>
+                    <a:pt x="859470" y="3580104"/>
+                  </a:lnTo>
+                  <a:lnTo>
+                    <a:pt x="787847" y="3585221"/>
+                  </a:lnTo>
+                  <a:lnTo>
+                    <a:pt x="716225" y="3589976"/>
+                  </a:lnTo>
+                  <a:lnTo>
+                    <a:pt x="644602" y="3594396"/>
+                  </a:lnTo>
+                  <a:lnTo>
+                    <a:pt x="572980" y="3598505"/>
+                  </a:lnTo>
+                  <a:lnTo>
+                    <a:pt x="501357" y="3602323"/>
+                  </a:lnTo>
+                  <a:lnTo>
+                    <a:pt x="429735" y="3605873"/>
+                  </a:lnTo>
+                  <a:lnTo>
+                    <a:pt x="358112" y="3609172"/>
+                  </a:lnTo>
+                  <a:lnTo>
+                    <a:pt x="286490" y="3612238"/>
+                  </a:lnTo>
+                  <a:lnTo>
+                    <a:pt x="214867" y="3615088"/>
+                  </a:lnTo>
+                  <a:lnTo>
+                    <a:pt x="143245" y="3617737"/>
+                  </a:lnTo>
+                  <a:lnTo>
+                    <a:pt x="71622" y="3620199"/>
+                  </a:lnTo>
+                  <a:lnTo>
+                    <a:pt x="0" y="3622487"/>
                   </a:lnTo>
                   <a:close/>
                 </a:path>
@@ -3495,212 +3495,212 @@
           <p:spPr>
             <a:xfrm>
               <a:off x="1172049" y="1896563"/>
-              <a:ext cx="4706768" cy="2781540"/>
+              <a:ext cx="4696354" cy="2780421"/>
             </a:xfrm>
             <a:custGeom>
               <a:avLst/>
               <a:pathLst>
-                <a:path w="4706768" h="2781540">
+                <a:path w="4696354" h="2780421">
                   <a:moveTo>
-                    <a:pt x="0" y="1371754"/>
+                    <a:pt x="0" y="1374531"/>
                   </a:moveTo>
                   <a:lnTo>
-                    <a:pt x="71622" y="1418986"/>
-                  </a:lnTo>
-                  <a:lnTo>
-                    <a:pt x="143245" y="1465240"/>
-                  </a:lnTo>
-                  <a:lnTo>
-                    <a:pt x="214867" y="1510537"/>
-                  </a:lnTo>
-                  <a:lnTo>
-                    <a:pt x="286490" y="1554895"/>
-                  </a:lnTo>
-                  <a:lnTo>
-                    <a:pt x="358112" y="1598335"/>
-                  </a:lnTo>
-                  <a:lnTo>
-                    <a:pt x="429735" y="1640875"/>
-                  </a:lnTo>
-                  <a:lnTo>
-                    <a:pt x="501357" y="1682534"/>
-                  </a:lnTo>
-                  <a:lnTo>
-                    <a:pt x="572980" y="1723331"/>
-                  </a:lnTo>
-                  <a:lnTo>
-                    <a:pt x="644602" y="1763283"/>
-                  </a:lnTo>
-                  <a:lnTo>
-                    <a:pt x="716225" y="1802407"/>
-                  </a:lnTo>
-                  <a:lnTo>
-                    <a:pt x="787847" y="1840722"/>
-                  </a:lnTo>
-                  <a:lnTo>
-                    <a:pt x="859470" y="1878243"/>
-                  </a:lnTo>
-                  <a:lnTo>
-                    <a:pt x="931092" y="1914987"/>
-                  </a:lnTo>
-                  <a:lnTo>
-                    <a:pt x="1002715" y="1950970"/>
-                  </a:lnTo>
-                  <a:lnTo>
-                    <a:pt x="1074337" y="1986208"/>
-                  </a:lnTo>
-                  <a:lnTo>
-                    <a:pt x="1145960" y="2020716"/>
-                  </a:lnTo>
-                  <a:lnTo>
-                    <a:pt x="1217582" y="2054510"/>
-                  </a:lnTo>
-                  <a:lnTo>
-                    <a:pt x="1289205" y="2087603"/>
-                  </a:lnTo>
-                  <a:lnTo>
-                    <a:pt x="1360827" y="2120012"/>
-                  </a:lnTo>
-                  <a:lnTo>
-                    <a:pt x="1432450" y="2151749"/>
-                  </a:lnTo>
-                  <a:lnTo>
-                    <a:pt x="1504073" y="2182830"/>
-                  </a:lnTo>
-                  <a:lnTo>
-                    <a:pt x="1575695" y="2213266"/>
-                  </a:lnTo>
-                  <a:lnTo>
-                    <a:pt x="1647318" y="2243073"/>
-                  </a:lnTo>
-                  <a:lnTo>
-                    <a:pt x="1718940" y="2272262"/>
-                  </a:lnTo>
-                  <a:lnTo>
-                    <a:pt x="1790563" y="2300846"/>
-                  </a:lnTo>
-                  <a:lnTo>
-                    <a:pt x="1862185" y="2328839"/>
-                  </a:lnTo>
-                  <a:lnTo>
-                    <a:pt x="1933808" y="2356252"/>
-                  </a:lnTo>
-                  <a:lnTo>
-                    <a:pt x="2005430" y="2383098"/>
-                  </a:lnTo>
-                  <a:lnTo>
-                    <a:pt x="2077053" y="2409387"/>
-                  </a:lnTo>
-                  <a:lnTo>
-                    <a:pt x="2148675" y="2435132"/>
-                  </a:lnTo>
-                  <a:lnTo>
-                    <a:pt x="2220298" y="2460344"/>
-                  </a:lnTo>
-                  <a:lnTo>
-                    <a:pt x="2291920" y="2485034"/>
-                  </a:lnTo>
-                  <a:lnTo>
-                    <a:pt x="2363543" y="2509213"/>
-                  </a:lnTo>
-                  <a:lnTo>
-                    <a:pt x="2435165" y="2532891"/>
-                  </a:lnTo>
-                  <a:lnTo>
-                    <a:pt x="2506788" y="2556078"/>
-                  </a:lnTo>
-                  <a:lnTo>
-                    <a:pt x="2578410" y="2578786"/>
-                  </a:lnTo>
-                  <a:lnTo>
-                    <a:pt x="2650033" y="2601023"/>
-                  </a:lnTo>
-                  <a:lnTo>
-                    <a:pt x="2721655" y="2622800"/>
-                  </a:lnTo>
-                  <a:lnTo>
-                    <a:pt x="2793278" y="2644126"/>
-                  </a:lnTo>
-                  <a:lnTo>
-                    <a:pt x="2864901" y="2665010"/>
-                  </a:lnTo>
-                  <a:lnTo>
-                    <a:pt x="2936523" y="2685462"/>
-                  </a:lnTo>
-                  <a:lnTo>
-                    <a:pt x="3008146" y="2705490"/>
-                  </a:lnTo>
-                  <a:lnTo>
-                    <a:pt x="3079768" y="2725103"/>
-                  </a:lnTo>
-                  <a:lnTo>
-                    <a:pt x="3151391" y="2744311"/>
-                  </a:lnTo>
-                  <a:lnTo>
-                    <a:pt x="3223013" y="2763120"/>
-                  </a:lnTo>
-                  <a:lnTo>
-                    <a:pt x="3294636" y="2781540"/>
-                  </a:lnTo>
-                  <a:lnTo>
-                    <a:pt x="3366258" y="2722395"/>
-                  </a:lnTo>
-                  <a:lnTo>
-                    <a:pt x="3437881" y="2651897"/>
-                  </a:lnTo>
-                  <a:lnTo>
-                    <a:pt x="3509503" y="2576056"/>
-                  </a:lnTo>
-                  <a:lnTo>
-                    <a:pt x="3581126" y="2494469"/>
-                  </a:lnTo>
-                  <a:lnTo>
-                    <a:pt x="3652748" y="2406698"/>
-                  </a:lnTo>
-                  <a:lnTo>
-                    <a:pt x="3724371" y="2312275"/>
-                  </a:lnTo>
-                  <a:lnTo>
-                    <a:pt x="3795993" y="2210697"/>
-                  </a:lnTo>
-                  <a:lnTo>
-                    <a:pt x="3867616" y="2101421"/>
-                  </a:lnTo>
-                  <a:lnTo>
-                    <a:pt x="3939238" y="1983863"/>
-                  </a:lnTo>
-                  <a:lnTo>
-                    <a:pt x="4010861" y="1857397"/>
-                  </a:lnTo>
-                  <a:lnTo>
-                    <a:pt x="4082483" y="1721346"/>
-                  </a:lnTo>
-                  <a:lnTo>
-                    <a:pt x="4154106" y="1574985"/>
-                  </a:lnTo>
-                  <a:lnTo>
-                    <a:pt x="4225729" y="1417532"/>
-                  </a:lnTo>
-                  <a:lnTo>
-                    <a:pt x="4297351" y="1248147"/>
-                  </a:lnTo>
-                  <a:lnTo>
-                    <a:pt x="4368974" y="1065925"/>
-                  </a:lnTo>
-                  <a:lnTo>
-                    <a:pt x="4440596" y="869894"/>
-                  </a:lnTo>
-                  <a:lnTo>
-                    <a:pt x="4512219" y="659007"/>
-                  </a:lnTo>
-                  <a:lnTo>
-                    <a:pt x="4583841" y="432137"/>
-                  </a:lnTo>
-                  <a:lnTo>
-                    <a:pt x="4655464" y="188075"/>
-                  </a:lnTo>
-                  <a:lnTo>
-                    <a:pt x="4706768" y="0"/>
+                    <a:pt x="71622" y="1421767"/>
+                  </a:lnTo>
+                  <a:lnTo>
+                    <a:pt x="143245" y="1468023"/>
+                  </a:lnTo>
+                  <a:lnTo>
+                    <a:pt x="214867" y="1513320"/>
+                  </a:lnTo>
+                  <a:lnTo>
+                    <a:pt x="286490" y="1557678"/>
+                  </a:lnTo>
+                  <a:lnTo>
+                    <a:pt x="358112" y="1601116"/>
+                  </a:lnTo>
+                  <a:lnTo>
+                    <a:pt x="429735" y="1643654"/>
+                  </a:lnTo>
+                  <a:lnTo>
+                    <a:pt x="501357" y="1685309"/>
+                  </a:lnTo>
+                  <a:lnTo>
+                    <a:pt x="572980" y="1726101"/>
+                  </a:lnTo>
+                  <a:lnTo>
+                    <a:pt x="644602" y="1766047"/>
+                  </a:lnTo>
+                  <a:lnTo>
+                    <a:pt x="716225" y="1805165"/>
+                  </a:lnTo>
+                  <a:lnTo>
+                    <a:pt x="787847" y="1843472"/>
+                  </a:lnTo>
+                  <a:lnTo>
+                    <a:pt x="859470" y="1880984"/>
+                  </a:lnTo>
+                  <a:lnTo>
+                    <a:pt x="931092" y="1917719"/>
+                  </a:lnTo>
+                  <a:lnTo>
+                    <a:pt x="1002715" y="1953692"/>
+                  </a:lnTo>
+                  <a:lnTo>
+                    <a:pt x="1074337" y="1988919"/>
+                  </a:lnTo>
+                  <a:lnTo>
+                    <a:pt x="1145960" y="2023415"/>
+                  </a:lnTo>
+                  <a:lnTo>
+                    <a:pt x="1217582" y="2057197"/>
+                  </a:lnTo>
+                  <a:lnTo>
+                    <a:pt x="1289205" y="2090278"/>
+                  </a:lnTo>
+                  <a:lnTo>
+                    <a:pt x="1360827" y="2122673"/>
+                  </a:lnTo>
+                  <a:lnTo>
+                    <a:pt x="1432450" y="2154396"/>
+                  </a:lnTo>
+                  <a:lnTo>
+                    <a:pt x="1504073" y="2185461"/>
+                  </a:lnTo>
+                  <a:lnTo>
+                    <a:pt x="1575695" y="2215883"/>
+                  </a:lnTo>
+                  <a:lnTo>
+                    <a:pt x="1647318" y="2245673"/>
+                  </a:lnTo>
+                  <a:lnTo>
+                    <a:pt x="1718940" y="2274846"/>
+                  </a:lnTo>
+                  <a:lnTo>
+                    <a:pt x="1790563" y="2303414"/>
+                  </a:lnTo>
+                  <a:lnTo>
+                    <a:pt x="1862185" y="2331390"/>
+                  </a:lnTo>
+                  <a:lnTo>
+                    <a:pt x="1933808" y="2358786"/>
+                  </a:lnTo>
+                  <a:lnTo>
+                    <a:pt x="2005430" y="2385613"/>
+                  </a:lnTo>
+                  <a:lnTo>
+                    <a:pt x="2077053" y="2411885"/>
+                  </a:lnTo>
+                  <a:lnTo>
+                    <a:pt x="2148675" y="2437611"/>
+                  </a:lnTo>
+                  <a:lnTo>
+                    <a:pt x="2220298" y="2462804"/>
+                  </a:lnTo>
+                  <a:lnTo>
+                    <a:pt x="2291920" y="2487475"/>
+                  </a:lnTo>
+                  <a:lnTo>
+                    <a:pt x="2363543" y="2511634"/>
+                  </a:lnTo>
+                  <a:lnTo>
+                    <a:pt x="2435165" y="2535293"/>
+                  </a:lnTo>
+                  <a:lnTo>
+                    <a:pt x="2506788" y="2558461"/>
+                  </a:lnTo>
+                  <a:lnTo>
+                    <a:pt x="2578410" y="2581148"/>
+                  </a:lnTo>
+                  <a:lnTo>
+                    <a:pt x="2650033" y="2603365"/>
+                  </a:lnTo>
+                  <a:lnTo>
+                    <a:pt x="2721655" y="2625121"/>
+                  </a:lnTo>
+                  <a:lnTo>
+                    <a:pt x="2793278" y="2646427"/>
+                  </a:lnTo>
+                  <a:lnTo>
+                    <a:pt x="2864901" y="2667290"/>
+                  </a:lnTo>
+                  <a:lnTo>
+                    <a:pt x="2936523" y="2687721"/>
+                  </a:lnTo>
+                  <a:lnTo>
+                    <a:pt x="3008146" y="2707728"/>
+                  </a:lnTo>
+                  <a:lnTo>
+                    <a:pt x="3079768" y="2727321"/>
+                  </a:lnTo>
+                  <a:lnTo>
+                    <a:pt x="3151391" y="2746507"/>
+                  </a:lnTo>
+                  <a:lnTo>
+                    <a:pt x="3223013" y="2765295"/>
+                  </a:lnTo>
+                  <a:lnTo>
+                    <a:pt x="3294636" y="2780421"/>
+                  </a:lnTo>
+                  <a:lnTo>
+                    <a:pt x="3366258" y="2714232"/>
+                  </a:lnTo>
+                  <a:lnTo>
+                    <a:pt x="3437881" y="2643019"/>
+                  </a:lnTo>
+                  <a:lnTo>
+                    <a:pt x="3509503" y="2566402"/>
+                  </a:lnTo>
+                  <a:lnTo>
+                    <a:pt x="3581126" y="2483972"/>
+                  </a:lnTo>
+                  <a:lnTo>
+                    <a:pt x="3652748" y="2395286"/>
+                  </a:lnTo>
+                  <a:lnTo>
+                    <a:pt x="3724371" y="2299869"/>
+                  </a:lnTo>
+                  <a:lnTo>
+                    <a:pt x="3795993" y="2197213"/>
+                  </a:lnTo>
+                  <a:lnTo>
+                    <a:pt x="3867616" y="2086765"/>
+                  </a:lnTo>
+                  <a:lnTo>
+                    <a:pt x="3939238" y="1967937"/>
+                  </a:lnTo>
+                  <a:lnTo>
+                    <a:pt x="4010861" y="1840091"/>
+                  </a:lnTo>
+                  <a:lnTo>
+                    <a:pt x="4082483" y="1702543"/>
+                  </a:lnTo>
+                  <a:lnTo>
+                    <a:pt x="4154106" y="1554557"/>
+                  </a:lnTo>
+                  <a:lnTo>
+                    <a:pt x="4225729" y="1395341"/>
+                  </a:lnTo>
+                  <a:lnTo>
+                    <a:pt x="4297351" y="1224043"/>
+                  </a:lnTo>
+                  <a:lnTo>
+                    <a:pt x="4368974" y="1039746"/>
+                  </a:lnTo>
+                  <a:lnTo>
+                    <a:pt x="4440596" y="841463"/>
+                  </a:lnTo>
+                  <a:lnTo>
+                    <a:pt x="4512219" y="628133"/>
+                  </a:lnTo>
+                  <a:lnTo>
+                    <a:pt x="4583841" y="398614"/>
+                  </a:lnTo>
+                  <a:lnTo>
+                    <a:pt x="4655464" y="151678"/>
+                  </a:lnTo>
+                  <a:lnTo>
+                    <a:pt x="4696354" y="0"/>
                   </a:lnTo>
                 </a:path>
               </a:pathLst>
@@ -3720,312 +3720,312 @@
           </p:nvSpPr>
           <p:spPr>
             <a:xfrm>
-              <a:off x="1172049" y="4684490"/>
-              <a:ext cx="7090630" cy="834689"/>
+              <a:off x="1172049" y="4680257"/>
+              <a:ext cx="7090630" cy="838793"/>
             </a:xfrm>
             <a:custGeom>
               <a:avLst/>
               <a:pathLst>
-                <a:path w="7090630" h="834689">
+                <a:path w="7090630" h="838793">
                   <a:moveTo>
-                    <a:pt x="7090630" y="577360"/>
+                    <a:pt x="7090630" y="582718"/>
                   </a:moveTo>
                   <a:lnTo>
-                    <a:pt x="7019007" y="571284"/>
-                  </a:lnTo>
-                  <a:lnTo>
-                    <a:pt x="6947385" y="565079"/>
-                  </a:lnTo>
-                  <a:lnTo>
-                    <a:pt x="6875762" y="558743"/>
-                  </a:lnTo>
-                  <a:lnTo>
-                    <a:pt x="6804139" y="552273"/>
-                  </a:lnTo>
-                  <a:lnTo>
-                    <a:pt x="6732517" y="545666"/>
-                  </a:lnTo>
-                  <a:lnTo>
-                    <a:pt x="6660894" y="538920"/>
-                  </a:lnTo>
-                  <a:lnTo>
-                    <a:pt x="6589272" y="532030"/>
-                  </a:lnTo>
-                  <a:lnTo>
-                    <a:pt x="6517649" y="524996"/>
-                  </a:lnTo>
-                  <a:lnTo>
-                    <a:pt x="6446027" y="517812"/>
-                  </a:lnTo>
-                  <a:lnTo>
-                    <a:pt x="6374404" y="510476"/>
-                  </a:lnTo>
-                  <a:lnTo>
-                    <a:pt x="6302782" y="502986"/>
-                  </a:lnTo>
-                  <a:lnTo>
-                    <a:pt x="6231159" y="495337"/>
-                  </a:lnTo>
-                  <a:lnTo>
-                    <a:pt x="6159537" y="487526"/>
-                  </a:lnTo>
-                  <a:lnTo>
-                    <a:pt x="6087914" y="479550"/>
-                  </a:lnTo>
-                  <a:lnTo>
-                    <a:pt x="6016292" y="471405"/>
-                  </a:lnTo>
-                  <a:lnTo>
-                    <a:pt x="5944669" y="463088"/>
-                  </a:lnTo>
-                  <a:lnTo>
-                    <a:pt x="5873047" y="454596"/>
-                  </a:lnTo>
-                  <a:lnTo>
-                    <a:pt x="5801424" y="445923"/>
-                  </a:lnTo>
-                  <a:lnTo>
-                    <a:pt x="5729802" y="437068"/>
-                  </a:lnTo>
-                  <a:lnTo>
-                    <a:pt x="5658179" y="428025"/>
-                  </a:lnTo>
-                  <a:lnTo>
-                    <a:pt x="5586557" y="418791"/>
-                  </a:lnTo>
-                  <a:lnTo>
-                    <a:pt x="5514934" y="409361"/>
-                  </a:lnTo>
-                  <a:lnTo>
-                    <a:pt x="5443311" y="399732"/>
-                  </a:lnTo>
-                  <a:lnTo>
-                    <a:pt x="5371689" y="389900"/>
-                  </a:lnTo>
-                  <a:lnTo>
-                    <a:pt x="5300066" y="379860"/>
-                  </a:lnTo>
-                  <a:lnTo>
-                    <a:pt x="5228444" y="369607"/>
-                  </a:lnTo>
-                  <a:lnTo>
-                    <a:pt x="5156821" y="359138"/>
-                  </a:lnTo>
-                  <a:lnTo>
-                    <a:pt x="5085199" y="348447"/>
-                  </a:lnTo>
-                  <a:lnTo>
-                    <a:pt x="5013576" y="337530"/>
-                  </a:lnTo>
-                  <a:lnTo>
-                    <a:pt x="4941954" y="326382"/>
-                  </a:lnTo>
-                  <a:lnTo>
-                    <a:pt x="4870331" y="314999"/>
-                  </a:lnTo>
-                  <a:lnTo>
-                    <a:pt x="4798709" y="303375"/>
-                  </a:lnTo>
-                  <a:lnTo>
-                    <a:pt x="4727086" y="291505"/>
-                  </a:lnTo>
-                  <a:lnTo>
-                    <a:pt x="4655464" y="279384"/>
-                  </a:lnTo>
-                  <a:lnTo>
-                    <a:pt x="4583841" y="267006"/>
-                  </a:lnTo>
-                  <a:lnTo>
-                    <a:pt x="4512219" y="254367"/>
-                  </a:lnTo>
-                  <a:lnTo>
-                    <a:pt x="4440596" y="241461"/>
-                  </a:lnTo>
-                  <a:lnTo>
-                    <a:pt x="4368974" y="228282"/>
-                  </a:lnTo>
-                  <a:lnTo>
-                    <a:pt x="4297351" y="214824"/>
-                  </a:lnTo>
-                  <a:lnTo>
-                    <a:pt x="4225729" y="201082"/>
-                  </a:lnTo>
-                  <a:lnTo>
-                    <a:pt x="4154106" y="187049"/>
-                  </a:lnTo>
-                  <a:lnTo>
-                    <a:pt x="4082483" y="172719"/>
-                  </a:lnTo>
-                  <a:lnTo>
-                    <a:pt x="4010861" y="158086"/>
-                  </a:lnTo>
-                  <a:lnTo>
-                    <a:pt x="3939238" y="143144"/>
-                  </a:lnTo>
-                  <a:lnTo>
-                    <a:pt x="3867616" y="127886"/>
-                  </a:lnTo>
-                  <a:lnTo>
-                    <a:pt x="3795993" y="112305"/>
-                  </a:lnTo>
-                  <a:lnTo>
-                    <a:pt x="3724371" y="96395"/>
-                  </a:lnTo>
-                  <a:lnTo>
-                    <a:pt x="3652748" y="80148"/>
-                  </a:lnTo>
-                  <a:lnTo>
-                    <a:pt x="3581126" y="63558"/>
-                  </a:lnTo>
-                  <a:lnTo>
-                    <a:pt x="3509503" y="46617"/>
-                  </a:lnTo>
-                  <a:lnTo>
-                    <a:pt x="3437881" y="29317"/>
-                  </a:lnTo>
-                  <a:lnTo>
-                    <a:pt x="3366258" y="11652"/>
+                    <a:pt x="7019007" y="576657"/>
+                  </a:lnTo>
+                  <a:lnTo>
+                    <a:pt x="6947385" y="570468"/>
+                  </a:lnTo>
+                  <a:lnTo>
+                    <a:pt x="6875762" y="564148"/>
+                  </a:lnTo>
+                  <a:lnTo>
+                    <a:pt x="6804139" y="557695"/>
+                  </a:lnTo>
+                  <a:lnTo>
+                    <a:pt x="6732517" y="551104"/>
+                  </a:lnTo>
+                  <a:lnTo>
+                    <a:pt x="6660894" y="544374"/>
+                  </a:lnTo>
+                  <a:lnTo>
+                    <a:pt x="6589272" y="537502"/>
+                  </a:lnTo>
+                  <a:lnTo>
+                    <a:pt x="6517649" y="530484"/>
+                  </a:lnTo>
+                  <a:lnTo>
+                    <a:pt x="6446027" y="523318"/>
+                  </a:lnTo>
+                  <a:lnTo>
+                    <a:pt x="6374404" y="515999"/>
+                  </a:lnTo>
+                  <a:lnTo>
+                    <a:pt x="6302782" y="508526"/>
+                  </a:lnTo>
+                  <a:lnTo>
+                    <a:pt x="6231159" y="500895"/>
+                  </a:lnTo>
+                  <a:lnTo>
+                    <a:pt x="6159537" y="493102"/>
+                  </a:lnTo>
+                  <a:lnTo>
+                    <a:pt x="6087914" y="485144"/>
+                  </a:lnTo>
+                  <a:lnTo>
+                    <a:pt x="6016292" y="477017"/>
+                  </a:lnTo>
+                  <a:lnTo>
+                    <a:pt x="5944669" y="468719"/>
+                  </a:lnTo>
+                  <a:lnTo>
+                    <a:pt x="5873047" y="460244"/>
+                  </a:lnTo>
+                  <a:lnTo>
+                    <a:pt x="5801424" y="451590"/>
+                  </a:lnTo>
+                  <a:lnTo>
+                    <a:pt x="5729802" y="442753"/>
+                  </a:lnTo>
+                  <a:lnTo>
+                    <a:pt x="5658179" y="433729"/>
+                  </a:lnTo>
+                  <a:lnTo>
+                    <a:pt x="5586557" y="424514"/>
+                  </a:lnTo>
+                  <a:lnTo>
+                    <a:pt x="5514934" y="415104"/>
+                  </a:lnTo>
+                  <a:lnTo>
+                    <a:pt x="5443311" y="405494"/>
+                  </a:lnTo>
+                  <a:lnTo>
+                    <a:pt x="5371689" y="395681"/>
+                  </a:lnTo>
+                  <a:lnTo>
+                    <a:pt x="5300066" y="385661"/>
+                  </a:lnTo>
+                  <a:lnTo>
+                    <a:pt x="5228444" y="375428"/>
+                  </a:lnTo>
+                  <a:lnTo>
+                    <a:pt x="5156821" y="364978"/>
+                  </a:lnTo>
+                  <a:lnTo>
+                    <a:pt x="5085199" y="354307"/>
+                  </a:lnTo>
+                  <a:lnTo>
+                    <a:pt x="5013576" y="343410"/>
+                  </a:lnTo>
+                  <a:lnTo>
+                    <a:pt x="4941954" y="332283"/>
+                  </a:lnTo>
+                  <a:lnTo>
+                    <a:pt x="4870331" y="320920"/>
+                  </a:lnTo>
+                  <a:lnTo>
+                    <a:pt x="4798709" y="309316"/>
+                  </a:lnTo>
+                  <a:lnTo>
+                    <a:pt x="4727086" y="297466"/>
+                  </a:lnTo>
+                  <a:lnTo>
+                    <a:pt x="4655464" y="285366"/>
+                  </a:lnTo>
+                  <a:lnTo>
+                    <a:pt x="4583841" y="273010"/>
+                  </a:lnTo>
+                  <a:lnTo>
+                    <a:pt x="4512219" y="260391"/>
+                  </a:lnTo>
+                  <a:lnTo>
+                    <a:pt x="4440596" y="247506"/>
+                  </a:lnTo>
+                  <a:lnTo>
+                    <a:pt x="4368974" y="234348"/>
+                  </a:lnTo>
+                  <a:lnTo>
+                    <a:pt x="4297351" y="220911"/>
+                  </a:lnTo>
+                  <a:lnTo>
+                    <a:pt x="4225729" y="207190"/>
+                  </a:lnTo>
+                  <a:lnTo>
+                    <a:pt x="4154106" y="193178"/>
+                  </a:lnTo>
+                  <a:lnTo>
+                    <a:pt x="4082483" y="178869"/>
+                  </a:lnTo>
+                  <a:lnTo>
+                    <a:pt x="4010861" y="164258"/>
+                  </a:lnTo>
+                  <a:lnTo>
+                    <a:pt x="3939238" y="149337"/>
+                  </a:lnTo>
+                  <a:lnTo>
+                    <a:pt x="3867616" y="134100"/>
+                  </a:lnTo>
+                  <a:lnTo>
+                    <a:pt x="3795993" y="118541"/>
+                  </a:lnTo>
+                  <a:lnTo>
+                    <a:pt x="3724371" y="102652"/>
+                  </a:lnTo>
+                  <a:lnTo>
+                    <a:pt x="3652748" y="86427"/>
+                  </a:lnTo>
+                  <a:lnTo>
+                    <a:pt x="3581126" y="69858"/>
+                  </a:lnTo>
+                  <a:lnTo>
+                    <a:pt x="3509503" y="52938"/>
+                  </a:lnTo>
+                  <a:lnTo>
+                    <a:pt x="3437881" y="35661"/>
+                  </a:lnTo>
+                  <a:lnTo>
+                    <a:pt x="3366258" y="18017"/>
                   </a:lnTo>
                   <a:lnTo>
                     <a:pt x="3294636" y="0"/>
                   </a:lnTo>
                   <a:lnTo>
-                    <a:pt x="3223013" y="60915"/>
-                  </a:lnTo>
-                  <a:lnTo>
-                    <a:pt x="3151391" y="117539"/>
-                  </a:lnTo>
-                  <a:lnTo>
-                    <a:pt x="3079768" y="170174"/>
-                  </a:lnTo>
-                  <a:lnTo>
-                    <a:pt x="3008146" y="219101"/>
-                  </a:lnTo>
-                  <a:lnTo>
-                    <a:pt x="2936523" y="264582"/>
-                  </a:lnTo>
-                  <a:lnTo>
-                    <a:pt x="2864901" y="306858"/>
-                  </a:lnTo>
-                  <a:lnTo>
-                    <a:pt x="2793278" y="346157"/>
-                  </a:lnTo>
-                  <a:lnTo>
-                    <a:pt x="2721655" y="382687"/>
-                  </a:lnTo>
-                  <a:lnTo>
-                    <a:pt x="2650033" y="416643"/>
-                  </a:lnTo>
-                  <a:lnTo>
-                    <a:pt x="2578410" y="448208"/>
-                  </a:lnTo>
-                  <a:lnTo>
-                    <a:pt x="2506788" y="477549"/>
-                  </a:lnTo>
-                  <a:lnTo>
-                    <a:pt x="2435165" y="504823"/>
-                  </a:lnTo>
-                  <a:lnTo>
-                    <a:pt x="2363543" y="530176"/>
-                  </a:lnTo>
-                  <a:lnTo>
-                    <a:pt x="2291920" y="553743"/>
-                  </a:lnTo>
-                  <a:lnTo>
-                    <a:pt x="2220298" y="575649"/>
-                  </a:lnTo>
-                  <a:lnTo>
-                    <a:pt x="2148675" y="596013"/>
-                  </a:lnTo>
-                  <a:lnTo>
-                    <a:pt x="2077053" y="614942"/>
-                  </a:lnTo>
-                  <a:lnTo>
-                    <a:pt x="2005430" y="632537"/>
-                  </a:lnTo>
-                  <a:lnTo>
-                    <a:pt x="1933808" y="648893"/>
-                  </a:lnTo>
-                  <a:lnTo>
-                    <a:pt x="1862185" y="664097"/>
-                  </a:lnTo>
-                  <a:lnTo>
-                    <a:pt x="1790563" y="678229"/>
-                  </a:lnTo>
-                  <a:lnTo>
-                    <a:pt x="1718940" y="691367"/>
-                  </a:lnTo>
-                  <a:lnTo>
-                    <a:pt x="1647318" y="703578"/>
-                  </a:lnTo>
-                  <a:lnTo>
-                    <a:pt x="1575695" y="714930"/>
-                  </a:lnTo>
-                  <a:lnTo>
-                    <a:pt x="1504073" y="725481"/>
-                  </a:lnTo>
-                  <a:lnTo>
-                    <a:pt x="1432450" y="735290"/>
-                  </a:lnTo>
-                  <a:lnTo>
-                    <a:pt x="1360827" y="744407"/>
-                  </a:lnTo>
-                  <a:lnTo>
-                    <a:pt x="1289205" y="752883"/>
-                  </a:lnTo>
-                  <a:lnTo>
-                    <a:pt x="1217582" y="760761"/>
-                  </a:lnTo>
-                  <a:lnTo>
-                    <a:pt x="1145960" y="768084"/>
-                  </a:lnTo>
-                  <a:lnTo>
-                    <a:pt x="1074337" y="774891"/>
-                  </a:lnTo>
-                  <a:lnTo>
-                    <a:pt x="1002715" y="781219"/>
-                  </a:lnTo>
-                  <a:lnTo>
-                    <a:pt x="931092" y="787101"/>
-                  </a:lnTo>
-                  <a:lnTo>
-                    <a:pt x="859470" y="792569"/>
-                  </a:lnTo>
-                  <a:lnTo>
-                    <a:pt x="787847" y="797651"/>
-                  </a:lnTo>
-                  <a:lnTo>
-                    <a:pt x="716225" y="802376"/>
-                  </a:lnTo>
-                  <a:lnTo>
-                    <a:pt x="644602" y="806767"/>
-                  </a:lnTo>
-                  <a:lnTo>
-                    <a:pt x="572980" y="810850"/>
-                  </a:lnTo>
-                  <a:lnTo>
-                    <a:pt x="501357" y="814644"/>
-                  </a:lnTo>
-                  <a:lnTo>
-                    <a:pt x="429735" y="818172"/>
-                  </a:lnTo>
-                  <a:lnTo>
-                    <a:pt x="358112" y="821450"/>
-                  </a:lnTo>
-                  <a:lnTo>
-                    <a:pt x="286490" y="824498"/>
-                  </a:lnTo>
-                  <a:lnTo>
-                    <a:pt x="214867" y="827332"/>
-                  </a:lnTo>
-                  <a:lnTo>
-                    <a:pt x="143245" y="829965"/>
-                  </a:lnTo>
-                  <a:lnTo>
-                    <a:pt x="71622" y="832413"/>
-                  </a:lnTo>
-                  <a:lnTo>
-                    <a:pt x="0" y="834689"/>
+                    <a:pt x="3223013" y="58248"/>
+                  </a:lnTo>
+                  <a:lnTo>
+                    <a:pt x="3151391" y="115430"/>
+                  </a:lnTo>
+                  <a:lnTo>
+                    <a:pt x="3079768" y="168578"/>
+                  </a:lnTo>
+                  <a:lnTo>
+                    <a:pt x="3008146" y="217978"/>
+                  </a:lnTo>
+                  <a:lnTo>
+                    <a:pt x="2936523" y="263893"/>
+                  </a:lnTo>
+                  <a:lnTo>
+                    <a:pt x="2864901" y="306570"/>
+                  </a:lnTo>
+                  <a:lnTo>
+                    <a:pt x="2793278" y="346237"/>
+                  </a:lnTo>
+                  <a:lnTo>
+                    <a:pt x="2721655" y="383106"/>
+                  </a:lnTo>
+                  <a:lnTo>
+                    <a:pt x="2650033" y="417374"/>
+                  </a:lnTo>
+                  <a:lnTo>
+                    <a:pt x="2578410" y="449225"/>
+                  </a:lnTo>
+                  <a:lnTo>
+                    <a:pt x="2506788" y="478830"/>
+                  </a:lnTo>
+                  <a:lnTo>
+                    <a:pt x="2435165" y="506346"/>
+                  </a:lnTo>
+                  <a:lnTo>
+                    <a:pt x="2363543" y="531922"/>
+                  </a:lnTo>
+                  <a:lnTo>
+                    <a:pt x="2291920" y="555694"/>
+                  </a:lnTo>
+                  <a:lnTo>
+                    <a:pt x="2220298" y="577789"/>
+                  </a:lnTo>
+                  <a:lnTo>
+                    <a:pt x="2148675" y="598325"/>
+                  </a:lnTo>
+                  <a:lnTo>
+                    <a:pt x="2077053" y="617414"/>
+                  </a:lnTo>
+                  <a:lnTo>
+                    <a:pt x="2005430" y="635155"/>
+                  </a:lnTo>
+                  <a:lnTo>
+                    <a:pt x="1933808" y="651646"/>
+                  </a:lnTo>
+                  <a:lnTo>
+                    <a:pt x="1862185" y="666973"/>
+                  </a:lnTo>
+                  <a:lnTo>
+                    <a:pt x="1790563" y="681219"/>
+                  </a:lnTo>
+                  <a:lnTo>
+                    <a:pt x="1718940" y="694460"/>
+                  </a:lnTo>
+                  <a:lnTo>
+                    <a:pt x="1647318" y="706768"/>
+                  </a:lnTo>
+                  <a:lnTo>
+                    <a:pt x="1575695" y="718207"/>
+                  </a:lnTo>
+                  <a:lnTo>
+                    <a:pt x="1504073" y="728839"/>
+                  </a:lnTo>
+                  <a:lnTo>
+                    <a:pt x="1432450" y="738722"/>
+                  </a:lnTo>
+                  <a:lnTo>
+                    <a:pt x="1360827" y="747907"/>
+                  </a:lnTo>
+                  <a:lnTo>
+                    <a:pt x="1289205" y="756445"/>
+                  </a:lnTo>
+                  <a:lnTo>
+                    <a:pt x="1217582" y="764380"/>
+                  </a:lnTo>
+                  <a:lnTo>
+                    <a:pt x="1145960" y="771756"/>
+                  </a:lnTo>
+                  <a:lnTo>
+                    <a:pt x="1074337" y="778611"/>
+                  </a:lnTo>
+                  <a:lnTo>
+                    <a:pt x="1002715" y="784983"/>
+                  </a:lnTo>
+                  <a:lnTo>
+                    <a:pt x="931092" y="790905"/>
+                  </a:lnTo>
+                  <a:lnTo>
+                    <a:pt x="859470" y="796410"/>
+                  </a:lnTo>
+                  <a:lnTo>
+                    <a:pt x="787847" y="801526"/>
+                  </a:lnTo>
+                  <a:lnTo>
+                    <a:pt x="716225" y="806282"/>
+                  </a:lnTo>
+                  <a:lnTo>
+                    <a:pt x="644602" y="810702"/>
+                  </a:lnTo>
+                  <a:lnTo>
+                    <a:pt x="572980" y="814810"/>
+                  </a:lnTo>
+                  <a:lnTo>
+                    <a:pt x="501357" y="818629"/>
+                  </a:lnTo>
+                  <a:lnTo>
+                    <a:pt x="429735" y="822178"/>
+                  </a:lnTo>
+                  <a:lnTo>
+                    <a:pt x="358112" y="825477"/>
+                  </a:lnTo>
+                  <a:lnTo>
+                    <a:pt x="286490" y="828543"/>
+                  </a:lnTo>
+                  <a:lnTo>
+                    <a:pt x="214867" y="831393"/>
+                  </a:lnTo>
+                  <a:lnTo>
+                    <a:pt x="143245" y="834042"/>
+                  </a:lnTo>
+                  <a:lnTo>
+                    <a:pt x="71622" y="836504"/>
+                  </a:lnTo>
+                  <a:lnTo>
+                    <a:pt x="0" y="838793"/>
                   </a:lnTo>
                 </a:path>
               </a:pathLst>
@@ -4045,309 +4045,309 @@
           </p:nvSpPr>
           <p:spPr>
             <a:xfrm>
-              <a:off x="1172049" y="2094907"/>
-              <a:ext cx="7090630" cy="3192593"/>
+              <a:off x="1172049" y="2078002"/>
+              <a:ext cx="7090630" cy="3209100"/>
             </a:xfrm>
             <a:custGeom>
               <a:avLst/>
               <a:pathLst>
-                <a:path w="7090630" h="3192593">
+                <a:path w="7090630" h="3209100">
                   <a:moveTo>
-                    <a:pt x="0" y="3192593"/>
+                    <a:pt x="0" y="3209100"/>
                   </a:moveTo>
                   <a:lnTo>
-                    <a:pt x="71622" y="3185683"/>
-                  </a:lnTo>
-                  <a:lnTo>
-                    <a:pt x="143245" y="3178590"/>
-                  </a:lnTo>
-                  <a:lnTo>
-                    <a:pt x="214867" y="3171310"/>
-                  </a:lnTo>
-                  <a:lnTo>
-                    <a:pt x="286490" y="3163838"/>
-                  </a:lnTo>
-                  <a:lnTo>
-                    <a:pt x="358112" y="3156168"/>
-                  </a:lnTo>
-                  <a:lnTo>
-                    <a:pt x="429735" y="3148296"/>
-                  </a:lnTo>
-                  <a:lnTo>
-                    <a:pt x="501357" y="3140216"/>
-                  </a:lnTo>
-                  <a:lnTo>
-                    <a:pt x="572980" y="3131923"/>
-                  </a:lnTo>
-                  <a:lnTo>
-                    <a:pt x="644602" y="3123411"/>
-                  </a:lnTo>
-                  <a:lnTo>
-                    <a:pt x="716225" y="3114674"/>
-                  </a:lnTo>
-                  <a:lnTo>
-                    <a:pt x="787847" y="3105706"/>
-                  </a:lnTo>
-                  <a:lnTo>
-                    <a:pt x="859470" y="3096501"/>
-                  </a:lnTo>
-                  <a:lnTo>
-                    <a:pt x="931092" y="3087054"/>
-                  </a:lnTo>
-                  <a:lnTo>
-                    <a:pt x="1002715" y="3077357"/>
-                  </a:lnTo>
-                  <a:lnTo>
-                    <a:pt x="1074337" y="3067404"/>
-                  </a:lnTo>
-                  <a:lnTo>
-                    <a:pt x="1145960" y="3057188"/>
-                  </a:lnTo>
-                  <a:lnTo>
-                    <a:pt x="1217582" y="3046702"/>
-                  </a:lnTo>
-                  <a:lnTo>
-                    <a:pt x="1289205" y="3035940"/>
-                  </a:lnTo>
-                  <a:lnTo>
-                    <a:pt x="1360827" y="3024893"/>
-                  </a:lnTo>
-                  <a:lnTo>
-                    <a:pt x="1432450" y="3013555"/>
-                  </a:lnTo>
-                  <a:lnTo>
-                    <a:pt x="1504073" y="3001917"/>
-                  </a:lnTo>
-                  <a:lnTo>
-                    <a:pt x="1575695" y="2989972"/>
-                  </a:lnTo>
-                  <a:lnTo>
-                    <a:pt x="1647318" y="2977712"/>
-                  </a:lnTo>
-                  <a:lnTo>
-                    <a:pt x="1718940" y="2965127"/>
-                  </a:lnTo>
-                  <a:lnTo>
-                    <a:pt x="1790563" y="2952211"/>
-                  </a:lnTo>
-                  <a:lnTo>
-                    <a:pt x="1862185" y="2938953"/>
-                  </a:lnTo>
-                  <a:lnTo>
-                    <a:pt x="1933808" y="2925346"/>
-                  </a:lnTo>
-                  <a:lnTo>
-                    <a:pt x="2005430" y="2911379"/>
-                  </a:lnTo>
-                  <a:lnTo>
-                    <a:pt x="2077053" y="2897043"/>
-                  </a:lnTo>
-                  <a:lnTo>
-                    <a:pt x="2148675" y="2882329"/>
-                  </a:lnTo>
-                  <a:lnTo>
-                    <a:pt x="2220298" y="2867226"/>
-                  </a:lnTo>
-                  <a:lnTo>
-                    <a:pt x="2291920" y="2851725"/>
-                  </a:lnTo>
-                  <a:lnTo>
-                    <a:pt x="2363543" y="2835814"/>
-                  </a:lnTo>
-                  <a:lnTo>
-                    <a:pt x="2435165" y="2819483"/>
-                  </a:lnTo>
-                  <a:lnTo>
-                    <a:pt x="2506788" y="2802721"/>
-                  </a:lnTo>
-                  <a:lnTo>
-                    <a:pt x="2578410" y="2785516"/>
-                  </a:lnTo>
-                  <a:lnTo>
-                    <a:pt x="2650033" y="2767857"/>
-                  </a:lnTo>
-                  <a:lnTo>
-                    <a:pt x="2721655" y="2749732"/>
-                  </a:lnTo>
-                  <a:lnTo>
-                    <a:pt x="2793278" y="2731128"/>
-                  </a:lnTo>
-                  <a:lnTo>
-                    <a:pt x="2864901" y="2712033"/>
-                  </a:lnTo>
-                  <a:lnTo>
-                    <a:pt x="2936523" y="2692433"/>
-                  </a:lnTo>
-                  <a:lnTo>
-                    <a:pt x="3008146" y="2672317"/>
-                  </a:lnTo>
-                  <a:lnTo>
-                    <a:pt x="3079768" y="2651669"/>
-                  </a:lnTo>
-                  <a:lnTo>
-                    <a:pt x="3151391" y="2630475"/>
-                  </a:lnTo>
-                  <a:lnTo>
-                    <a:pt x="3223013" y="2608722"/>
-                  </a:lnTo>
-                  <a:lnTo>
-                    <a:pt x="3294636" y="2586395"/>
-                  </a:lnTo>
-                  <a:lnTo>
-                    <a:pt x="3366258" y="2563478"/>
-                  </a:lnTo>
-                  <a:lnTo>
-                    <a:pt x="3437881" y="2539957"/>
-                  </a:lnTo>
-                  <a:lnTo>
-                    <a:pt x="3509503" y="2515814"/>
-                  </a:lnTo>
-                  <a:lnTo>
-                    <a:pt x="3581126" y="2491033"/>
-                  </a:lnTo>
-                  <a:lnTo>
-                    <a:pt x="3652748" y="2465598"/>
-                  </a:lnTo>
-                  <a:lnTo>
-                    <a:pt x="3724371" y="2439492"/>
-                  </a:lnTo>
-                  <a:lnTo>
-                    <a:pt x="3795993" y="2412696"/>
-                  </a:lnTo>
-                  <a:lnTo>
-                    <a:pt x="3867616" y="2385193"/>
-                  </a:lnTo>
-                  <a:lnTo>
-                    <a:pt x="3939238" y="2356963"/>
-                  </a:lnTo>
-                  <a:lnTo>
-                    <a:pt x="4010861" y="2327989"/>
-                  </a:lnTo>
-                  <a:lnTo>
-                    <a:pt x="4082483" y="2298249"/>
-                  </a:lnTo>
-                  <a:lnTo>
-                    <a:pt x="4154106" y="2267723"/>
-                  </a:lnTo>
-                  <a:lnTo>
-                    <a:pt x="4225729" y="2236392"/>
-                  </a:lnTo>
-                  <a:lnTo>
-                    <a:pt x="4297351" y="2204234"/>
-                  </a:lnTo>
-                  <a:lnTo>
-                    <a:pt x="4368974" y="2171226"/>
-                  </a:lnTo>
-                  <a:lnTo>
-                    <a:pt x="4440596" y="2137347"/>
-                  </a:lnTo>
-                  <a:lnTo>
-                    <a:pt x="4512219" y="2102573"/>
-                  </a:lnTo>
-                  <a:lnTo>
-                    <a:pt x="4583841" y="2066881"/>
-                  </a:lnTo>
-                  <a:lnTo>
-                    <a:pt x="4655464" y="2030247"/>
-                  </a:lnTo>
-                  <a:lnTo>
-                    <a:pt x="4727086" y="1992645"/>
-                  </a:lnTo>
-                  <a:lnTo>
-                    <a:pt x="4798709" y="1954050"/>
-                  </a:lnTo>
-                  <a:lnTo>
-                    <a:pt x="4870331" y="1914437"/>
-                  </a:lnTo>
-                  <a:lnTo>
-                    <a:pt x="4941954" y="1873777"/>
-                  </a:lnTo>
-                  <a:lnTo>
-                    <a:pt x="5013576" y="1832044"/>
-                  </a:lnTo>
-                  <a:lnTo>
-                    <a:pt x="5085199" y="1789208"/>
-                  </a:lnTo>
-                  <a:lnTo>
-                    <a:pt x="5156821" y="1745242"/>
-                  </a:lnTo>
-                  <a:lnTo>
-                    <a:pt x="5228444" y="1700115"/>
-                  </a:lnTo>
-                  <a:lnTo>
-                    <a:pt x="5300066" y="1653796"/>
-                  </a:lnTo>
-                  <a:lnTo>
-                    <a:pt x="5371689" y="1606254"/>
-                  </a:lnTo>
-                  <a:lnTo>
-                    <a:pt x="5443311" y="1557457"/>
-                  </a:lnTo>
-                  <a:lnTo>
-                    <a:pt x="5514934" y="1507372"/>
-                  </a:lnTo>
-                  <a:lnTo>
-                    <a:pt x="5586557" y="1455964"/>
-                  </a:lnTo>
-                  <a:lnTo>
-                    <a:pt x="5658179" y="1403198"/>
-                  </a:lnTo>
-                  <a:lnTo>
-                    <a:pt x="5729802" y="1349039"/>
-                  </a:lnTo>
-                  <a:lnTo>
-                    <a:pt x="5801424" y="1293450"/>
-                  </a:lnTo>
-                  <a:lnTo>
-                    <a:pt x="5873047" y="1236394"/>
-                  </a:lnTo>
-                  <a:lnTo>
-                    <a:pt x="5944669" y="1177831"/>
-                  </a:lnTo>
-                  <a:lnTo>
-                    <a:pt x="6016292" y="1117721"/>
-                  </a:lnTo>
-                  <a:lnTo>
-                    <a:pt x="6087914" y="1056024"/>
-                  </a:lnTo>
-                  <a:lnTo>
-                    <a:pt x="6159537" y="992698"/>
-                  </a:lnTo>
-                  <a:lnTo>
-                    <a:pt x="6231159" y="927701"/>
-                  </a:lnTo>
-                  <a:lnTo>
-                    <a:pt x="6302782" y="860986"/>
-                  </a:lnTo>
-                  <a:lnTo>
-                    <a:pt x="6374404" y="792511"/>
-                  </a:lnTo>
-                  <a:lnTo>
-                    <a:pt x="6446027" y="722227"/>
-                  </a:lnTo>
-                  <a:lnTo>
-                    <a:pt x="6517649" y="650087"/>
-                  </a:lnTo>
-                  <a:lnTo>
-                    <a:pt x="6589272" y="576043"/>
-                  </a:lnTo>
-                  <a:lnTo>
-                    <a:pt x="6660894" y="500043"/>
-                  </a:lnTo>
-                  <a:lnTo>
-                    <a:pt x="6732517" y="422037"/>
-                  </a:lnTo>
-                  <a:lnTo>
-                    <a:pt x="6804139" y="341971"/>
-                  </a:lnTo>
-                  <a:lnTo>
-                    <a:pt x="6875762" y="259790"/>
-                  </a:lnTo>
-                  <a:lnTo>
-                    <a:pt x="6947385" y="175440"/>
-                  </a:lnTo>
-                  <a:lnTo>
-                    <a:pt x="7019007" y="88863"/>
+                    <a:pt x="71622" y="3202170"/>
+                  </a:lnTo>
+                  <a:lnTo>
+                    <a:pt x="143245" y="3195056"/>
+                  </a:lnTo>
+                  <a:lnTo>
+                    <a:pt x="214867" y="3187755"/>
+                  </a:lnTo>
+                  <a:lnTo>
+                    <a:pt x="286490" y="3180261"/>
+                  </a:lnTo>
+                  <a:lnTo>
+                    <a:pt x="358112" y="3172569"/>
+                  </a:lnTo>
+                  <a:lnTo>
+                    <a:pt x="429735" y="3164673"/>
+                  </a:lnTo>
+                  <a:lnTo>
+                    <a:pt x="501357" y="3156568"/>
+                  </a:lnTo>
+                  <a:lnTo>
+                    <a:pt x="572980" y="3148249"/>
+                  </a:lnTo>
+                  <a:lnTo>
+                    <a:pt x="644602" y="3139711"/>
+                  </a:lnTo>
+                  <a:lnTo>
+                    <a:pt x="716225" y="3130946"/>
+                  </a:lnTo>
+                  <a:lnTo>
+                    <a:pt x="787847" y="3121950"/>
+                  </a:lnTo>
+                  <a:lnTo>
+                    <a:pt x="859470" y="3112716"/>
+                  </a:lnTo>
+                  <a:lnTo>
+                    <a:pt x="931092" y="3103237"/>
+                  </a:lnTo>
+                  <a:lnTo>
+                    <a:pt x="1002715" y="3093508"/>
+                  </a:lnTo>
+                  <a:lnTo>
+                    <a:pt x="1074337" y="3083522"/>
+                  </a:lnTo>
+                  <a:lnTo>
+                    <a:pt x="1145960" y="3073272"/>
+                  </a:lnTo>
+                  <a:lnTo>
+                    <a:pt x="1217582" y="3062751"/>
+                  </a:lnTo>
+                  <a:lnTo>
+                    <a:pt x="1289205" y="3051952"/>
+                  </a:lnTo>
+                  <a:lnTo>
+                    <a:pt x="1360827" y="3040867"/>
+                  </a:lnTo>
+                  <a:lnTo>
+                    <a:pt x="1432450" y="3029489"/>
+                  </a:lnTo>
+                  <a:lnTo>
+                    <a:pt x="1504073" y="3017810"/>
+                  </a:lnTo>
+                  <a:lnTo>
+                    <a:pt x="1575695" y="3005822"/>
+                  </a:lnTo>
+                  <a:lnTo>
+                    <a:pt x="1647318" y="2993518"/>
+                  </a:lnTo>
+                  <a:lnTo>
+                    <a:pt x="1718940" y="2980888"/>
+                  </a:lnTo>
+                  <a:lnTo>
+                    <a:pt x="1790563" y="2967924"/>
+                  </a:lnTo>
+                  <a:lnTo>
+                    <a:pt x="1862185" y="2954618"/>
+                  </a:lnTo>
+                  <a:lnTo>
+                    <a:pt x="1933808" y="2940960"/>
+                  </a:lnTo>
+                  <a:lnTo>
+                    <a:pt x="2005430" y="2926940"/>
+                  </a:lnTo>
+                  <a:lnTo>
+                    <a:pt x="2077053" y="2912550"/>
+                  </a:lnTo>
+                  <a:lnTo>
+                    <a:pt x="2148675" y="2897779"/>
+                  </a:lnTo>
+                  <a:lnTo>
+                    <a:pt x="2220298" y="2882618"/>
+                  </a:lnTo>
+                  <a:lnTo>
+                    <a:pt x="2291920" y="2867056"/>
+                  </a:lnTo>
+                  <a:lnTo>
+                    <a:pt x="2363543" y="2851083"/>
+                  </a:lnTo>
+                  <a:lnTo>
+                    <a:pt x="2435165" y="2834687"/>
+                  </a:lnTo>
+                  <a:lnTo>
+                    <a:pt x="2506788" y="2817858"/>
+                  </a:lnTo>
+                  <a:lnTo>
+                    <a:pt x="2578410" y="2800584"/>
+                  </a:lnTo>
+                  <a:lnTo>
+                    <a:pt x="2650033" y="2782853"/>
+                  </a:lnTo>
+                  <a:lnTo>
+                    <a:pt x="2721655" y="2764653"/>
+                  </a:lnTo>
+                  <a:lnTo>
+                    <a:pt x="2793278" y="2745972"/>
+                  </a:lnTo>
+                  <a:lnTo>
+                    <a:pt x="2864901" y="2726797"/>
+                  </a:lnTo>
+                  <a:lnTo>
+                    <a:pt x="2936523" y="2707116"/>
+                  </a:lnTo>
+                  <a:lnTo>
+                    <a:pt x="3008146" y="2686913"/>
+                  </a:lnTo>
+                  <a:lnTo>
+                    <a:pt x="3079768" y="2666177"/>
+                  </a:lnTo>
+                  <a:lnTo>
+                    <a:pt x="3151391" y="2644892"/>
+                  </a:lnTo>
+                  <a:lnTo>
+                    <a:pt x="3223013" y="2623045"/>
+                  </a:lnTo>
+                  <a:lnTo>
+                    <a:pt x="3294636" y="2600620"/>
+                  </a:lnTo>
+                  <a:lnTo>
+                    <a:pt x="3366258" y="2577602"/>
+                  </a:lnTo>
+                  <a:lnTo>
+                    <a:pt x="3437881" y="2553976"/>
+                  </a:lnTo>
+                  <a:lnTo>
+                    <a:pt x="3509503" y="2529725"/>
+                  </a:lnTo>
+                  <a:lnTo>
+                    <a:pt x="3581126" y="2504832"/>
+                  </a:lnTo>
+                  <a:lnTo>
+                    <a:pt x="3652748" y="2479282"/>
+                  </a:lnTo>
+                  <a:lnTo>
+                    <a:pt x="3724371" y="2453056"/>
+                  </a:lnTo>
+                  <a:lnTo>
+                    <a:pt x="3795993" y="2426137"/>
+                  </a:lnTo>
+                  <a:lnTo>
+                    <a:pt x="3867616" y="2398505"/>
+                  </a:lnTo>
+                  <a:lnTo>
+                    <a:pt x="3939238" y="2370144"/>
+                  </a:lnTo>
+                  <a:lnTo>
+                    <a:pt x="4010861" y="2341032"/>
+                  </a:lnTo>
+                  <a:lnTo>
+                    <a:pt x="4082483" y="2311151"/>
+                  </a:lnTo>
+                  <a:lnTo>
+                    <a:pt x="4154106" y="2280480"/>
+                  </a:lnTo>
+                  <a:lnTo>
+                    <a:pt x="4225729" y="2248997"/>
+                  </a:lnTo>
+                  <a:lnTo>
+                    <a:pt x="4297351" y="2216683"/>
+                  </a:lnTo>
+                  <a:lnTo>
+                    <a:pt x="4368974" y="2183514"/>
+                  </a:lnTo>
+                  <a:lnTo>
+                    <a:pt x="4440596" y="2149468"/>
+                  </a:lnTo>
+                  <a:lnTo>
+                    <a:pt x="4512219" y="2114521"/>
+                  </a:lnTo>
+                  <a:lnTo>
+                    <a:pt x="4583841" y="2078651"/>
+                  </a:lnTo>
+                  <a:lnTo>
+                    <a:pt x="4655464" y="2041833"/>
+                  </a:lnTo>
+                  <a:lnTo>
+                    <a:pt x="4727086" y="2004041"/>
+                  </a:lnTo>
+                  <a:lnTo>
+                    <a:pt x="4798709" y="1965250"/>
+                  </a:lnTo>
+                  <a:lnTo>
+                    <a:pt x="4870331" y="1925433"/>
+                  </a:lnTo>
+                  <a:lnTo>
+                    <a:pt x="4941954" y="1884563"/>
+                  </a:lnTo>
+                  <a:lnTo>
+                    <a:pt x="5013576" y="1842613"/>
+                  </a:lnTo>
+                  <a:lnTo>
+                    <a:pt x="5085199" y="1799554"/>
+                  </a:lnTo>
+                  <a:lnTo>
+                    <a:pt x="5156821" y="1755356"/>
+                  </a:lnTo>
+                  <a:lnTo>
+                    <a:pt x="5228444" y="1709990"/>
+                  </a:lnTo>
+                  <a:lnTo>
+                    <a:pt x="5300066" y="1663424"/>
+                  </a:lnTo>
+                  <a:lnTo>
+                    <a:pt x="5371689" y="1615627"/>
+                  </a:lnTo>
+                  <a:lnTo>
+                    <a:pt x="5443311" y="1566567"/>
+                  </a:lnTo>
+                  <a:lnTo>
+                    <a:pt x="5514934" y="1516209"/>
+                  </a:lnTo>
+                  <a:lnTo>
+                    <a:pt x="5586557" y="1464520"/>
+                  </a:lnTo>
+                  <a:lnTo>
+                    <a:pt x="5658179" y="1411464"/>
+                  </a:lnTo>
+                  <a:lnTo>
+                    <a:pt x="5729802" y="1357005"/>
+                  </a:lnTo>
+                  <a:lnTo>
+                    <a:pt x="5801424" y="1301107"/>
+                  </a:lnTo>
+                  <a:lnTo>
+                    <a:pt x="5873047" y="1243730"/>
+                  </a:lnTo>
+                  <a:lnTo>
+                    <a:pt x="5944669" y="1184837"/>
+                  </a:lnTo>
+                  <a:lnTo>
+                    <a:pt x="6016292" y="1124386"/>
+                  </a:lnTo>
+                  <a:lnTo>
+                    <a:pt x="6087914" y="1062337"/>
+                  </a:lnTo>
+                  <a:lnTo>
+                    <a:pt x="6159537" y="998648"/>
+                  </a:lnTo>
+                  <a:lnTo>
+                    <a:pt x="6231159" y="933275"/>
+                  </a:lnTo>
+                  <a:lnTo>
+                    <a:pt x="6302782" y="866173"/>
+                  </a:lnTo>
+                  <a:lnTo>
+                    <a:pt x="6374404" y="797297"/>
+                  </a:lnTo>
+                  <a:lnTo>
+                    <a:pt x="6446027" y="726600"/>
+                  </a:lnTo>
+                  <a:lnTo>
+                    <a:pt x="6517649" y="654034"/>
+                  </a:lnTo>
+                  <a:lnTo>
+                    <a:pt x="6589272" y="579549"/>
+                  </a:lnTo>
+                  <a:lnTo>
+                    <a:pt x="6660894" y="503095"/>
+                  </a:lnTo>
+                  <a:lnTo>
+                    <a:pt x="6732517" y="424619"/>
+                  </a:lnTo>
+                  <a:lnTo>
+                    <a:pt x="6804139" y="344069"/>
+                  </a:lnTo>
+                  <a:lnTo>
+                    <a:pt x="6875762" y="261389"/>
+                  </a:lnTo>
+                  <a:lnTo>
+                    <a:pt x="6947385" y="176523"/>
+                  </a:lnTo>
+                  <a:lnTo>
+                    <a:pt x="7019007" y="89413"/>
                   </a:lnTo>
                   <a:lnTo>
                     <a:pt x="7090630" y="0"/>
@@ -4422,7 +4422,7 @@
           </p:nvSpPr>
           <p:spPr>
             <a:xfrm>
-              <a:off x="4472293" y="1896563"/>
+              <a:off x="4463824" y="1896563"/>
               <a:ext cx="0" cy="3826579"/>
             </a:xfrm>
             <a:custGeom>
@@ -4695,7 +4695,7 @@
           </p:nvSpPr>
           <p:spPr>
             <a:xfrm>
-              <a:off x="2004858" y="5785772"/>
+              <a:off x="2005445" y="5785772"/>
               <a:ext cx="223753" cy="80101"/>
             </a:xfrm>
             <a:prstGeom prst="rect">
@@ -4741,7 +4741,7 @@
           </p:nvSpPr>
           <p:spPr>
             <a:xfrm>
-              <a:off x="4499764" y="5785772"/>
+              <a:off x="4497209" y="5785772"/>
               <a:ext cx="62179" cy="80101"/>
             </a:xfrm>
             <a:prstGeom prst="rect">
@@ -4787,7 +4787,7 @@
           </p:nvSpPr>
           <p:spPr>
             <a:xfrm>
-              <a:off x="6851704" y="5785772"/>
+              <a:off x="6846007" y="5785772"/>
               <a:ext cx="186537" cy="80101"/>
             </a:xfrm>
             <a:prstGeom prst="rect">
